--- a/gakkyu/tegami/pptx/Y1.pptx
+++ b/gakkyu/tegami/pptx/Y1.pptx
@@ -3622,6 +3622,7 @@
               <a:srgbClr val="6AA7A7"/>
             </a:solidFill>
           </a:ln>
+          <a:effectLst/>
         </p:spPr>
         <p:style>
           <a:lnRef idx="2">
@@ -3630,7 +3631,7 @@
           <a:fillRef idx="0">
             <a:schemeClr val="accent1"/>
           </a:fillRef>
-          <a:effectRef idx="1">
+          <a:effectRef idx="0">
             <a:schemeClr val="accent1"/>
           </a:effectRef>
           <a:fontRef idx="minor">
@@ -3681,7 +3682,7 @@
             <a:fillRef idx="3">
               <a:schemeClr val="accent1"/>
             </a:fillRef>
-            <a:effectRef idx="2">
+            <a:effectRef idx="0">
               <a:schemeClr val="accent1"/>
             </a:effectRef>
             <a:fontRef idx="minor">
@@ -3715,15 +3716,16 @@
                 <a:srgbClr val="8FBFBF"/>
               </a:solidFill>
             </a:ln>
-          </p:spPr>
-          <p:style>
-            <a:lnRef idx="2">
-              <a:schemeClr val="accent1"/>
-            </a:lnRef>
-            <a:fillRef idx="0">
-              <a:schemeClr val="accent1"/>
-            </a:fillRef>
-            <a:effectRef idx="1">
+            <a:effectLst/>
+          </p:spPr>
+          <p:style>
+            <a:lnRef idx="2">
+              <a:schemeClr val="accent1"/>
+            </a:lnRef>
+            <a:fillRef idx="0">
+              <a:schemeClr val="accent1"/>
+            </a:fillRef>
+            <a:effectRef idx="0">
               <a:schemeClr val="accent1"/>
             </a:effectRef>
             <a:fontRef idx="minor">
@@ -3750,15 +3752,16 @@
                 <a:srgbClr val="8FBFBF"/>
               </a:solidFill>
             </a:ln>
-          </p:spPr>
-          <p:style>
-            <a:lnRef idx="2">
-              <a:schemeClr val="accent1"/>
-            </a:lnRef>
-            <a:fillRef idx="0">
-              <a:schemeClr val="accent1"/>
-            </a:fillRef>
-            <a:effectRef idx="1">
+            <a:effectLst/>
+          </p:spPr>
+          <p:style>
+            <a:lnRef idx="2">
+              <a:schemeClr val="accent1"/>
+            </a:lnRef>
+            <a:fillRef idx="0">
+              <a:schemeClr val="accent1"/>
+            </a:fillRef>
+            <a:effectRef idx="0">
               <a:schemeClr val="accent1"/>
             </a:effectRef>
             <a:fontRef idx="minor">
@@ -3785,15 +3788,16 @@
                 <a:srgbClr val="8FBFBF"/>
               </a:solidFill>
             </a:ln>
-          </p:spPr>
-          <p:style>
-            <a:lnRef idx="2">
-              <a:schemeClr val="accent1"/>
-            </a:lnRef>
-            <a:fillRef idx="0">
-              <a:schemeClr val="accent1"/>
-            </a:fillRef>
-            <a:effectRef idx="1">
+            <a:effectLst/>
+          </p:spPr>
+          <p:style>
+            <a:lnRef idx="2">
+              <a:schemeClr val="accent1"/>
+            </a:lnRef>
+            <a:fillRef idx="0">
+              <a:schemeClr val="accent1"/>
+            </a:fillRef>
+            <a:effectRef idx="0">
               <a:schemeClr val="accent1"/>
             </a:effectRef>
             <a:fontRef idx="minor">
@@ -3820,15 +3824,16 @@
                 <a:srgbClr val="8FBFBF"/>
               </a:solidFill>
             </a:ln>
-          </p:spPr>
-          <p:style>
-            <a:lnRef idx="2">
-              <a:schemeClr val="accent1"/>
-            </a:lnRef>
-            <a:fillRef idx="0">
-              <a:schemeClr val="accent1"/>
-            </a:fillRef>
-            <a:effectRef idx="1">
+            <a:effectLst/>
+          </p:spPr>
+          <p:style>
+            <a:lnRef idx="2">
+              <a:schemeClr val="accent1"/>
+            </a:lnRef>
+            <a:fillRef idx="0">
+              <a:schemeClr val="accent1"/>
+            </a:fillRef>
+            <a:effectRef idx="0">
               <a:schemeClr val="accent1"/>
             </a:effectRef>
             <a:fontRef idx="minor">
@@ -3855,15 +3860,16 @@
                 <a:srgbClr val="8FBFBF"/>
               </a:solidFill>
             </a:ln>
-          </p:spPr>
-          <p:style>
-            <a:lnRef idx="2">
-              <a:schemeClr val="accent1"/>
-            </a:lnRef>
-            <a:fillRef idx="0">
-              <a:schemeClr val="accent1"/>
-            </a:fillRef>
-            <a:effectRef idx="1">
+            <a:effectLst/>
+          </p:spPr>
+          <p:style>
+            <a:lnRef idx="2">
+              <a:schemeClr val="accent1"/>
+            </a:lnRef>
+            <a:fillRef idx="0">
+              <a:schemeClr val="accent1"/>
+            </a:fillRef>
+            <a:effectRef idx="0">
               <a:schemeClr val="accent1"/>
             </a:effectRef>
             <a:fontRef idx="minor">
@@ -3890,15 +3896,16 @@
                 <a:srgbClr val="8FBFBF"/>
               </a:solidFill>
             </a:ln>
-          </p:spPr>
-          <p:style>
-            <a:lnRef idx="2">
-              <a:schemeClr val="accent1"/>
-            </a:lnRef>
-            <a:fillRef idx="0">
-              <a:schemeClr val="accent1"/>
-            </a:fillRef>
-            <a:effectRef idx="1">
+            <a:effectLst/>
+          </p:spPr>
+          <p:style>
+            <a:lnRef idx="2">
+              <a:schemeClr val="accent1"/>
+            </a:lnRef>
+            <a:fillRef idx="0">
+              <a:schemeClr val="accent1"/>
+            </a:fillRef>
+            <a:effectRef idx="0">
               <a:schemeClr val="accent1"/>
             </a:effectRef>
             <a:fontRef idx="minor">
@@ -3925,15 +3932,16 @@
                 <a:srgbClr val="8FBFBF"/>
               </a:solidFill>
             </a:ln>
-          </p:spPr>
-          <p:style>
-            <a:lnRef idx="2">
-              <a:schemeClr val="accent1"/>
-            </a:lnRef>
-            <a:fillRef idx="0">
-              <a:schemeClr val="accent1"/>
-            </a:fillRef>
-            <a:effectRef idx="1">
+            <a:effectLst/>
+          </p:spPr>
+          <p:style>
+            <a:lnRef idx="2">
+              <a:schemeClr val="accent1"/>
+            </a:lnRef>
+            <a:fillRef idx="0">
+              <a:schemeClr val="accent1"/>
+            </a:fillRef>
+            <a:effectRef idx="0">
               <a:schemeClr val="accent1"/>
             </a:effectRef>
             <a:fontRef idx="minor">
@@ -3960,15 +3968,16 @@
                 <a:srgbClr val="8FBFBF"/>
               </a:solidFill>
             </a:ln>
-          </p:spPr>
-          <p:style>
-            <a:lnRef idx="2">
-              <a:schemeClr val="accent1"/>
-            </a:lnRef>
-            <a:fillRef idx="0">
-              <a:schemeClr val="accent1"/>
-            </a:fillRef>
-            <a:effectRef idx="1">
+            <a:effectLst/>
+          </p:spPr>
+          <p:style>
+            <a:lnRef idx="2">
+              <a:schemeClr val="accent1"/>
+            </a:lnRef>
+            <a:fillRef idx="0">
+              <a:schemeClr val="accent1"/>
+            </a:fillRef>
+            <a:effectRef idx="0">
               <a:schemeClr val="accent1"/>
             </a:effectRef>
             <a:fontRef idx="minor">
@@ -3995,15 +4004,16 @@
                 <a:srgbClr val="8FBFBF"/>
               </a:solidFill>
             </a:ln>
-          </p:spPr>
-          <p:style>
-            <a:lnRef idx="2">
-              <a:schemeClr val="accent1"/>
-            </a:lnRef>
-            <a:fillRef idx="0">
-              <a:schemeClr val="accent1"/>
-            </a:fillRef>
-            <a:effectRef idx="1">
+            <a:effectLst/>
+          </p:spPr>
+          <p:style>
+            <a:lnRef idx="2">
+              <a:schemeClr val="accent1"/>
+            </a:lnRef>
+            <a:fillRef idx="0">
+              <a:schemeClr val="accent1"/>
+            </a:fillRef>
+            <a:effectRef idx="0">
               <a:schemeClr val="accent1"/>
             </a:effectRef>
             <a:fontRef idx="minor">
@@ -4030,15 +4040,16 @@
                 <a:srgbClr val="8FBFBF"/>
               </a:solidFill>
             </a:ln>
-          </p:spPr>
-          <p:style>
-            <a:lnRef idx="2">
-              <a:schemeClr val="accent1"/>
-            </a:lnRef>
-            <a:fillRef idx="0">
-              <a:schemeClr val="accent1"/>
-            </a:fillRef>
-            <a:effectRef idx="1">
+            <a:effectLst/>
+          </p:spPr>
+          <p:style>
+            <a:lnRef idx="2">
+              <a:schemeClr val="accent1"/>
+            </a:lnRef>
+            <a:fillRef idx="0">
+              <a:schemeClr val="accent1"/>
+            </a:fillRef>
+            <a:effectRef idx="0">
               <a:schemeClr val="accent1"/>
             </a:effectRef>
             <a:fontRef idx="minor">
@@ -4065,15 +4076,16 @@
                 <a:srgbClr val="8FBFBF"/>
               </a:solidFill>
             </a:ln>
-          </p:spPr>
-          <p:style>
-            <a:lnRef idx="2">
-              <a:schemeClr val="accent1"/>
-            </a:lnRef>
-            <a:fillRef idx="0">
-              <a:schemeClr val="accent1"/>
-            </a:fillRef>
-            <a:effectRef idx="1">
+            <a:effectLst/>
+          </p:spPr>
+          <p:style>
+            <a:lnRef idx="2">
+              <a:schemeClr val="accent1"/>
+            </a:lnRef>
+            <a:fillRef idx="0">
+              <a:schemeClr val="accent1"/>
+            </a:fillRef>
+            <a:effectRef idx="0">
               <a:schemeClr val="accent1"/>
             </a:effectRef>
             <a:fontRef idx="minor">
@@ -4125,7 +4137,7 @@
             <a:fillRef idx="3">
               <a:schemeClr val="accent1"/>
             </a:fillRef>
-            <a:effectRef idx="2">
+            <a:effectRef idx="0">
               <a:schemeClr val="accent1"/>
             </a:effectRef>
             <a:fontRef idx="minor">
@@ -4159,15 +4171,16 @@
                 <a:srgbClr val="8FBFBF"/>
               </a:solidFill>
             </a:ln>
-          </p:spPr>
-          <p:style>
-            <a:lnRef idx="2">
-              <a:schemeClr val="accent1"/>
-            </a:lnRef>
-            <a:fillRef idx="0">
-              <a:schemeClr val="accent1"/>
-            </a:fillRef>
-            <a:effectRef idx="1">
+            <a:effectLst/>
+          </p:spPr>
+          <p:style>
+            <a:lnRef idx="2">
+              <a:schemeClr val="accent1"/>
+            </a:lnRef>
+            <a:fillRef idx="0">
+              <a:schemeClr val="accent1"/>
+            </a:fillRef>
+            <a:effectRef idx="0">
               <a:schemeClr val="accent1"/>
             </a:effectRef>
             <a:fontRef idx="minor">
@@ -4194,15 +4207,16 @@
                 <a:srgbClr val="8FBFBF"/>
               </a:solidFill>
             </a:ln>
-          </p:spPr>
-          <p:style>
-            <a:lnRef idx="2">
-              <a:schemeClr val="accent1"/>
-            </a:lnRef>
-            <a:fillRef idx="0">
-              <a:schemeClr val="accent1"/>
-            </a:fillRef>
-            <a:effectRef idx="1">
+            <a:effectLst/>
+          </p:spPr>
+          <p:style>
+            <a:lnRef idx="2">
+              <a:schemeClr val="accent1"/>
+            </a:lnRef>
+            <a:fillRef idx="0">
+              <a:schemeClr val="accent1"/>
+            </a:fillRef>
+            <a:effectRef idx="0">
               <a:schemeClr val="accent1"/>
             </a:effectRef>
             <a:fontRef idx="minor">
@@ -4229,15 +4243,16 @@
                 <a:srgbClr val="8FBFBF"/>
               </a:solidFill>
             </a:ln>
-          </p:spPr>
-          <p:style>
-            <a:lnRef idx="2">
-              <a:schemeClr val="accent1"/>
-            </a:lnRef>
-            <a:fillRef idx="0">
-              <a:schemeClr val="accent1"/>
-            </a:fillRef>
-            <a:effectRef idx="1">
+            <a:effectLst/>
+          </p:spPr>
+          <p:style>
+            <a:lnRef idx="2">
+              <a:schemeClr val="accent1"/>
+            </a:lnRef>
+            <a:fillRef idx="0">
+              <a:schemeClr val="accent1"/>
+            </a:fillRef>
+            <a:effectRef idx="0">
               <a:schemeClr val="accent1"/>
             </a:effectRef>
             <a:fontRef idx="minor">
@@ -4264,15 +4279,16 @@
                 <a:srgbClr val="8FBFBF"/>
               </a:solidFill>
             </a:ln>
-          </p:spPr>
-          <p:style>
-            <a:lnRef idx="2">
-              <a:schemeClr val="accent1"/>
-            </a:lnRef>
-            <a:fillRef idx="0">
-              <a:schemeClr val="accent1"/>
-            </a:fillRef>
-            <a:effectRef idx="1">
+            <a:effectLst/>
+          </p:spPr>
+          <p:style>
+            <a:lnRef idx="2">
+              <a:schemeClr val="accent1"/>
+            </a:lnRef>
+            <a:fillRef idx="0">
+              <a:schemeClr val="accent1"/>
+            </a:fillRef>
+            <a:effectRef idx="0">
               <a:schemeClr val="accent1"/>
             </a:effectRef>
             <a:fontRef idx="minor">
@@ -4299,15 +4315,16 @@
                 <a:srgbClr val="8FBFBF"/>
               </a:solidFill>
             </a:ln>
-          </p:spPr>
-          <p:style>
-            <a:lnRef idx="2">
-              <a:schemeClr val="accent1"/>
-            </a:lnRef>
-            <a:fillRef idx="0">
-              <a:schemeClr val="accent1"/>
-            </a:fillRef>
-            <a:effectRef idx="1">
+            <a:effectLst/>
+          </p:spPr>
+          <p:style>
+            <a:lnRef idx="2">
+              <a:schemeClr val="accent1"/>
+            </a:lnRef>
+            <a:fillRef idx="0">
+              <a:schemeClr val="accent1"/>
+            </a:fillRef>
+            <a:effectRef idx="0">
               <a:schemeClr val="accent1"/>
             </a:effectRef>
             <a:fontRef idx="minor">
@@ -4334,15 +4351,16 @@
                 <a:srgbClr val="8FBFBF"/>
               </a:solidFill>
             </a:ln>
-          </p:spPr>
-          <p:style>
-            <a:lnRef idx="2">
-              <a:schemeClr val="accent1"/>
-            </a:lnRef>
-            <a:fillRef idx="0">
-              <a:schemeClr val="accent1"/>
-            </a:fillRef>
-            <a:effectRef idx="1">
+            <a:effectLst/>
+          </p:spPr>
+          <p:style>
+            <a:lnRef idx="2">
+              <a:schemeClr val="accent1"/>
+            </a:lnRef>
+            <a:fillRef idx="0">
+              <a:schemeClr val="accent1"/>
+            </a:fillRef>
+            <a:effectRef idx="0">
               <a:schemeClr val="accent1"/>
             </a:effectRef>
             <a:fontRef idx="minor">
@@ -4369,15 +4387,16 @@
                 <a:srgbClr val="8FBFBF"/>
               </a:solidFill>
             </a:ln>
-          </p:spPr>
-          <p:style>
-            <a:lnRef idx="2">
-              <a:schemeClr val="accent1"/>
-            </a:lnRef>
-            <a:fillRef idx="0">
-              <a:schemeClr val="accent1"/>
-            </a:fillRef>
-            <a:effectRef idx="1">
+            <a:effectLst/>
+          </p:spPr>
+          <p:style>
+            <a:lnRef idx="2">
+              <a:schemeClr val="accent1"/>
+            </a:lnRef>
+            <a:fillRef idx="0">
+              <a:schemeClr val="accent1"/>
+            </a:fillRef>
+            <a:effectRef idx="0">
               <a:schemeClr val="accent1"/>
             </a:effectRef>
             <a:fontRef idx="minor">
@@ -4404,15 +4423,16 @@
                 <a:srgbClr val="8FBFBF"/>
               </a:solidFill>
             </a:ln>
-          </p:spPr>
-          <p:style>
-            <a:lnRef idx="2">
-              <a:schemeClr val="accent1"/>
-            </a:lnRef>
-            <a:fillRef idx="0">
-              <a:schemeClr val="accent1"/>
-            </a:fillRef>
-            <a:effectRef idx="1">
+            <a:effectLst/>
+          </p:spPr>
+          <p:style>
+            <a:lnRef idx="2">
+              <a:schemeClr val="accent1"/>
+            </a:lnRef>
+            <a:fillRef idx="0">
+              <a:schemeClr val="accent1"/>
+            </a:fillRef>
+            <a:effectRef idx="0">
               <a:schemeClr val="accent1"/>
             </a:effectRef>
             <a:fontRef idx="minor">
@@ -4439,15 +4459,16 @@
                 <a:srgbClr val="8FBFBF"/>
               </a:solidFill>
             </a:ln>
-          </p:spPr>
-          <p:style>
-            <a:lnRef idx="2">
-              <a:schemeClr val="accent1"/>
-            </a:lnRef>
-            <a:fillRef idx="0">
-              <a:schemeClr val="accent1"/>
-            </a:fillRef>
-            <a:effectRef idx="1">
+            <a:effectLst/>
+          </p:spPr>
+          <p:style>
+            <a:lnRef idx="2">
+              <a:schemeClr val="accent1"/>
+            </a:lnRef>
+            <a:fillRef idx="0">
+              <a:schemeClr val="accent1"/>
+            </a:fillRef>
+            <a:effectRef idx="0">
               <a:schemeClr val="accent1"/>
             </a:effectRef>
             <a:fontRef idx="minor">
@@ -4474,15 +4495,16 @@
                 <a:srgbClr val="8FBFBF"/>
               </a:solidFill>
             </a:ln>
-          </p:spPr>
-          <p:style>
-            <a:lnRef idx="2">
-              <a:schemeClr val="accent1"/>
-            </a:lnRef>
-            <a:fillRef idx="0">
-              <a:schemeClr val="accent1"/>
-            </a:fillRef>
-            <a:effectRef idx="1">
+            <a:effectLst/>
+          </p:spPr>
+          <p:style>
+            <a:lnRef idx="2">
+              <a:schemeClr val="accent1"/>
+            </a:lnRef>
+            <a:fillRef idx="0">
+              <a:schemeClr val="accent1"/>
+            </a:fillRef>
+            <a:effectRef idx="0">
               <a:schemeClr val="accent1"/>
             </a:effectRef>
             <a:fontRef idx="minor">
@@ -4509,15 +4531,16 @@
                 <a:srgbClr val="8FBFBF"/>
               </a:solidFill>
             </a:ln>
-          </p:spPr>
-          <p:style>
-            <a:lnRef idx="2">
-              <a:schemeClr val="accent1"/>
-            </a:lnRef>
-            <a:fillRef idx="0">
-              <a:schemeClr val="accent1"/>
-            </a:fillRef>
-            <a:effectRef idx="1">
+            <a:effectLst/>
+          </p:spPr>
+          <p:style>
+            <a:lnRef idx="2">
+              <a:schemeClr val="accent1"/>
+            </a:lnRef>
+            <a:fillRef idx="0">
+              <a:schemeClr val="accent1"/>
+            </a:fillRef>
+            <a:effectRef idx="0">
               <a:schemeClr val="accent1"/>
             </a:effectRef>
             <a:fontRef idx="minor">
@@ -4569,7 +4592,7 @@
             <a:fillRef idx="3">
               <a:schemeClr val="accent1"/>
             </a:fillRef>
-            <a:effectRef idx="2">
+            <a:effectRef idx="0">
               <a:schemeClr val="accent1"/>
             </a:effectRef>
             <a:fontRef idx="minor">
@@ -4603,15 +4626,16 @@
                 <a:srgbClr val="8FBFBF"/>
               </a:solidFill>
             </a:ln>
-          </p:spPr>
-          <p:style>
-            <a:lnRef idx="2">
-              <a:schemeClr val="accent1"/>
-            </a:lnRef>
-            <a:fillRef idx="0">
-              <a:schemeClr val="accent1"/>
-            </a:fillRef>
-            <a:effectRef idx="1">
+            <a:effectLst/>
+          </p:spPr>
+          <p:style>
+            <a:lnRef idx="2">
+              <a:schemeClr val="accent1"/>
+            </a:lnRef>
+            <a:fillRef idx="0">
+              <a:schemeClr val="accent1"/>
+            </a:fillRef>
+            <a:effectRef idx="0">
               <a:schemeClr val="accent1"/>
             </a:effectRef>
             <a:fontRef idx="minor">
@@ -4638,15 +4662,16 @@
                 <a:srgbClr val="8FBFBF"/>
               </a:solidFill>
             </a:ln>
-          </p:spPr>
-          <p:style>
-            <a:lnRef idx="2">
-              <a:schemeClr val="accent1"/>
-            </a:lnRef>
-            <a:fillRef idx="0">
-              <a:schemeClr val="accent1"/>
-            </a:fillRef>
-            <a:effectRef idx="1">
+            <a:effectLst/>
+          </p:spPr>
+          <p:style>
+            <a:lnRef idx="2">
+              <a:schemeClr val="accent1"/>
+            </a:lnRef>
+            <a:fillRef idx="0">
+              <a:schemeClr val="accent1"/>
+            </a:fillRef>
+            <a:effectRef idx="0">
               <a:schemeClr val="accent1"/>
             </a:effectRef>
             <a:fontRef idx="minor">
@@ -4673,15 +4698,16 @@
                 <a:srgbClr val="8FBFBF"/>
               </a:solidFill>
             </a:ln>
-          </p:spPr>
-          <p:style>
-            <a:lnRef idx="2">
-              <a:schemeClr val="accent1"/>
-            </a:lnRef>
-            <a:fillRef idx="0">
-              <a:schemeClr val="accent1"/>
-            </a:fillRef>
-            <a:effectRef idx="1">
+            <a:effectLst/>
+          </p:spPr>
+          <p:style>
+            <a:lnRef idx="2">
+              <a:schemeClr val="accent1"/>
+            </a:lnRef>
+            <a:fillRef idx="0">
+              <a:schemeClr val="accent1"/>
+            </a:fillRef>
+            <a:effectRef idx="0">
               <a:schemeClr val="accent1"/>
             </a:effectRef>
             <a:fontRef idx="minor">
@@ -4708,15 +4734,16 @@
                 <a:srgbClr val="8FBFBF"/>
               </a:solidFill>
             </a:ln>
-          </p:spPr>
-          <p:style>
-            <a:lnRef idx="2">
-              <a:schemeClr val="accent1"/>
-            </a:lnRef>
-            <a:fillRef idx="0">
-              <a:schemeClr val="accent1"/>
-            </a:fillRef>
-            <a:effectRef idx="1">
+            <a:effectLst/>
+          </p:spPr>
+          <p:style>
+            <a:lnRef idx="2">
+              <a:schemeClr val="accent1"/>
+            </a:lnRef>
+            <a:fillRef idx="0">
+              <a:schemeClr val="accent1"/>
+            </a:fillRef>
+            <a:effectRef idx="0">
               <a:schemeClr val="accent1"/>
             </a:effectRef>
             <a:fontRef idx="minor">
@@ -4743,15 +4770,16 @@
                 <a:srgbClr val="8FBFBF"/>
               </a:solidFill>
             </a:ln>
-          </p:spPr>
-          <p:style>
-            <a:lnRef idx="2">
-              <a:schemeClr val="accent1"/>
-            </a:lnRef>
-            <a:fillRef idx="0">
-              <a:schemeClr val="accent1"/>
-            </a:fillRef>
-            <a:effectRef idx="1">
+            <a:effectLst/>
+          </p:spPr>
+          <p:style>
+            <a:lnRef idx="2">
+              <a:schemeClr val="accent1"/>
+            </a:lnRef>
+            <a:fillRef idx="0">
+              <a:schemeClr val="accent1"/>
+            </a:fillRef>
+            <a:effectRef idx="0">
               <a:schemeClr val="accent1"/>
             </a:effectRef>
             <a:fontRef idx="minor">
@@ -4778,15 +4806,16 @@
                 <a:srgbClr val="8FBFBF"/>
               </a:solidFill>
             </a:ln>
-          </p:spPr>
-          <p:style>
-            <a:lnRef idx="2">
-              <a:schemeClr val="accent1"/>
-            </a:lnRef>
-            <a:fillRef idx="0">
-              <a:schemeClr val="accent1"/>
-            </a:fillRef>
-            <a:effectRef idx="1">
+            <a:effectLst/>
+          </p:spPr>
+          <p:style>
+            <a:lnRef idx="2">
+              <a:schemeClr val="accent1"/>
+            </a:lnRef>
+            <a:fillRef idx="0">
+              <a:schemeClr val="accent1"/>
+            </a:fillRef>
+            <a:effectRef idx="0">
               <a:schemeClr val="accent1"/>
             </a:effectRef>
             <a:fontRef idx="minor">
@@ -4813,15 +4842,16 @@
                 <a:srgbClr val="8FBFBF"/>
               </a:solidFill>
             </a:ln>
-          </p:spPr>
-          <p:style>
-            <a:lnRef idx="2">
-              <a:schemeClr val="accent1"/>
-            </a:lnRef>
-            <a:fillRef idx="0">
-              <a:schemeClr val="accent1"/>
-            </a:fillRef>
-            <a:effectRef idx="1">
+            <a:effectLst/>
+          </p:spPr>
+          <p:style>
+            <a:lnRef idx="2">
+              <a:schemeClr val="accent1"/>
+            </a:lnRef>
+            <a:fillRef idx="0">
+              <a:schemeClr val="accent1"/>
+            </a:fillRef>
+            <a:effectRef idx="0">
               <a:schemeClr val="accent1"/>
             </a:effectRef>
             <a:fontRef idx="minor">
@@ -4848,15 +4878,16 @@
                 <a:srgbClr val="8FBFBF"/>
               </a:solidFill>
             </a:ln>
-          </p:spPr>
-          <p:style>
-            <a:lnRef idx="2">
-              <a:schemeClr val="accent1"/>
-            </a:lnRef>
-            <a:fillRef idx="0">
-              <a:schemeClr val="accent1"/>
-            </a:fillRef>
-            <a:effectRef idx="1">
+            <a:effectLst/>
+          </p:spPr>
+          <p:style>
+            <a:lnRef idx="2">
+              <a:schemeClr val="accent1"/>
+            </a:lnRef>
+            <a:fillRef idx="0">
+              <a:schemeClr val="accent1"/>
+            </a:fillRef>
+            <a:effectRef idx="0">
               <a:schemeClr val="accent1"/>
             </a:effectRef>
             <a:fontRef idx="minor">
@@ -4883,15 +4914,16 @@
                 <a:srgbClr val="8FBFBF"/>
               </a:solidFill>
             </a:ln>
-          </p:spPr>
-          <p:style>
-            <a:lnRef idx="2">
-              <a:schemeClr val="accent1"/>
-            </a:lnRef>
-            <a:fillRef idx="0">
-              <a:schemeClr val="accent1"/>
-            </a:fillRef>
-            <a:effectRef idx="1">
+            <a:effectLst/>
+          </p:spPr>
+          <p:style>
+            <a:lnRef idx="2">
+              <a:schemeClr val="accent1"/>
+            </a:lnRef>
+            <a:fillRef idx="0">
+              <a:schemeClr val="accent1"/>
+            </a:fillRef>
+            <a:effectRef idx="0">
               <a:schemeClr val="accent1"/>
             </a:effectRef>
             <a:fontRef idx="minor">
@@ -4918,15 +4950,16 @@
                 <a:srgbClr val="8FBFBF"/>
               </a:solidFill>
             </a:ln>
-          </p:spPr>
-          <p:style>
-            <a:lnRef idx="2">
-              <a:schemeClr val="accent1"/>
-            </a:lnRef>
-            <a:fillRef idx="0">
-              <a:schemeClr val="accent1"/>
-            </a:fillRef>
-            <a:effectRef idx="1">
+            <a:effectLst/>
+          </p:spPr>
+          <p:style>
+            <a:lnRef idx="2">
+              <a:schemeClr val="accent1"/>
+            </a:lnRef>
+            <a:fillRef idx="0">
+              <a:schemeClr val="accent1"/>
+            </a:fillRef>
+            <a:effectRef idx="0">
               <a:schemeClr val="accent1"/>
             </a:effectRef>
             <a:fontRef idx="minor">
@@ -4953,15 +4986,16 @@
                 <a:srgbClr val="8FBFBF"/>
               </a:solidFill>
             </a:ln>
-          </p:spPr>
-          <p:style>
-            <a:lnRef idx="2">
-              <a:schemeClr val="accent1"/>
-            </a:lnRef>
-            <a:fillRef idx="0">
-              <a:schemeClr val="accent1"/>
-            </a:fillRef>
-            <a:effectRef idx="1">
+            <a:effectLst/>
+          </p:spPr>
+          <p:style>
+            <a:lnRef idx="2">
+              <a:schemeClr val="accent1"/>
+            </a:lnRef>
+            <a:fillRef idx="0">
+              <a:schemeClr val="accent1"/>
+            </a:fillRef>
+            <a:effectRef idx="0">
               <a:schemeClr val="accent1"/>
             </a:effectRef>
             <a:fontRef idx="minor">
@@ -5013,7 +5047,7 @@
             <a:fillRef idx="3">
               <a:schemeClr val="accent1"/>
             </a:fillRef>
-            <a:effectRef idx="2">
+            <a:effectRef idx="0">
               <a:schemeClr val="accent1"/>
             </a:effectRef>
             <a:fontRef idx="minor">
@@ -5047,15 +5081,16 @@
                 <a:srgbClr val="8FBFBF"/>
               </a:solidFill>
             </a:ln>
-          </p:spPr>
-          <p:style>
-            <a:lnRef idx="2">
-              <a:schemeClr val="accent1"/>
-            </a:lnRef>
-            <a:fillRef idx="0">
-              <a:schemeClr val="accent1"/>
-            </a:fillRef>
-            <a:effectRef idx="1">
+            <a:effectLst/>
+          </p:spPr>
+          <p:style>
+            <a:lnRef idx="2">
+              <a:schemeClr val="accent1"/>
+            </a:lnRef>
+            <a:fillRef idx="0">
+              <a:schemeClr val="accent1"/>
+            </a:fillRef>
+            <a:effectRef idx="0">
               <a:schemeClr val="accent1"/>
             </a:effectRef>
             <a:fontRef idx="minor">
@@ -5082,15 +5117,16 @@
                 <a:srgbClr val="8FBFBF"/>
               </a:solidFill>
             </a:ln>
-          </p:spPr>
-          <p:style>
-            <a:lnRef idx="2">
-              <a:schemeClr val="accent1"/>
-            </a:lnRef>
-            <a:fillRef idx="0">
-              <a:schemeClr val="accent1"/>
-            </a:fillRef>
-            <a:effectRef idx="1">
+            <a:effectLst/>
+          </p:spPr>
+          <p:style>
+            <a:lnRef idx="2">
+              <a:schemeClr val="accent1"/>
+            </a:lnRef>
+            <a:fillRef idx="0">
+              <a:schemeClr val="accent1"/>
+            </a:fillRef>
+            <a:effectRef idx="0">
               <a:schemeClr val="accent1"/>
             </a:effectRef>
             <a:fontRef idx="minor">
@@ -5117,15 +5153,16 @@
                 <a:srgbClr val="8FBFBF"/>
               </a:solidFill>
             </a:ln>
-          </p:spPr>
-          <p:style>
-            <a:lnRef idx="2">
-              <a:schemeClr val="accent1"/>
-            </a:lnRef>
-            <a:fillRef idx="0">
-              <a:schemeClr val="accent1"/>
-            </a:fillRef>
-            <a:effectRef idx="1">
+            <a:effectLst/>
+          </p:spPr>
+          <p:style>
+            <a:lnRef idx="2">
+              <a:schemeClr val="accent1"/>
+            </a:lnRef>
+            <a:fillRef idx="0">
+              <a:schemeClr val="accent1"/>
+            </a:fillRef>
+            <a:effectRef idx="0">
               <a:schemeClr val="accent1"/>
             </a:effectRef>
             <a:fontRef idx="minor">
@@ -5152,15 +5189,16 @@
                 <a:srgbClr val="8FBFBF"/>
               </a:solidFill>
             </a:ln>
-          </p:spPr>
-          <p:style>
-            <a:lnRef idx="2">
-              <a:schemeClr val="accent1"/>
-            </a:lnRef>
-            <a:fillRef idx="0">
-              <a:schemeClr val="accent1"/>
-            </a:fillRef>
-            <a:effectRef idx="1">
+            <a:effectLst/>
+          </p:spPr>
+          <p:style>
+            <a:lnRef idx="2">
+              <a:schemeClr val="accent1"/>
+            </a:lnRef>
+            <a:fillRef idx="0">
+              <a:schemeClr val="accent1"/>
+            </a:fillRef>
+            <a:effectRef idx="0">
               <a:schemeClr val="accent1"/>
             </a:effectRef>
             <a:fontRef idx="minor">
@@ -5187,15 +5225,16 @@
                 <a:srgbClr val="8FBFBF"/>
               </a:solidFill>
             </a:ln>
-          </p:spPr>
-          <p:style>
-            <a:lnRef idx="2">
-              <a:schemeClr val="accent1"/>
-            </a:lnRef>
-            <a:fillRef idx="0">
-              <a:schemeClr val="accent1"/>
-            </a:fillRef>
-            <a:effectRef idx="1">
+            <a:effectLst/>
+          </p:spPr>
+          <p:style>
+            <a:lnRef idx="2">
+              <a:schemeClr val="accent1"/>
+            </a:lnRef>
+            <a:fillRef idx="0">
+              <a:schemeClr val="accent1"/>
+            </a:fillRef>
+            <a:effectRef idx="0">
               <a:schemeClr val="accent1"/>
             </a:effectRef>
             <a:fontRef idx="minor">
@@ -5222,15 +5261,16 @@
                 <a:srgbClr val="8FBFBF"/>
               </a:solidFill>
             </a:ln>
-          </p:spPr>
-          <p:style>
-            <a:lnRef idx="2">
-              <a:schemeClr val="accent1"/>
-            </a:lnRef>
-            <a:fillRef idx="0">
-              <a:schemeClr val="accent1"/>
-            </a:fillRef>
-            <a:effectRef idx="1">
+            <a:effectLst/>
+          </p:spPr>
+          <p:style>
+            <a:lnRef idx="2">
+              <a:schemeClr val="accent1"/>
+            </a:lnRef>
+            <a:fillRef idx="0">
+              <a:schemeClr val="accent1"/>
+            </a:fillRef>
+            <a:effectRef idx="0">
               <a:schemeClr val="accent1"/>
             </a:effectRef>
             <a:fontRef idx="minor">
@@ -5257,15 +5297,16 @@
                 <a:srgbClr val="8FBFBF"/>
               </a:solidFill>
             </a:ln>
-          </p:spPr>
-          <p:style>
-            <a:lnRef idx="2">
-              <a:schemeClr val="accent1"/>
-            </a:lnRef>
-            <a:fillRef idx="0">
-              <a:schemeClr val="accent1"/>
-            </a:fillRef>
-            <a:effectRef idx="1">
+            <a:effectLst/>
+          </p:spPr>
+          <p:style>
+            <a:lnRef idx="2">
+              <a:schemeClr val="accent1"/>
+            </a:lnRef>
+            <a:fillRef idx="0">
+              <a:schemeClr val="accent1"/>
+            </a:fillRef>
+            <a:effectRef idx="0">
               <a:schemeClr val="accent1"/>
             </a:effectRef>
             <a:fontRef idx="minor">
@@ -5292,15 +5333,16 @@
                 <a:srgbClr val="8FBFBF"/>
               </a:solidFill>
             </a:ln>
-          </p:spPr>
-          <p:style>
-            <a:lnRef idx="2">
-              <a:schemeClr val="accent1"/>
-            </a:lnRef>
-            <a:fillRef idx="0">
-              <a:schemeClr val="accent1"/>
-            </a:fillRef>
-            <a:effectRef idx="1">
+            <a:effectLst/>
+          </p:spPr>
+          <p:style>
+            <a:lnRef idx="2">
+              <a:schemeClr val="accent1"/>
+            </a:lnRef>
+            <a:fillRef idx="0">
+              <a:schemeClr val="accent1"/>
+            </a:fillRef>
+            <a:effectRef idx="0">
               <a:schemeClr val="accent1"/>
             </a:effectRef>
             <a:fontRef idx="minor">
@@ -5327,15 +5369,16 @@
                 <a:srgbClr val="8FBFBF"/>
               </a:solidFill>
             </a:ln>
-          </p:spPr>
-          <p:style>
-            <a:lnRef idx="2">
-              <a:schemeClr val="accent1"/>
-            </a:lnRef>
-            <a:fillRef idx="0">
-              <a:schemeClr val="accent1"/>
-            </a:fillRef>
-            <a:effectRef idx="1">
+            <a:effectLst/>
+          </p:spPr>
+          <p:style>
+            <a:lnRef idx="2">
+              <a:schemeClr val="accent1"/>
+            </a:lnRef>
+            <a:fillRef idx="0">
+              <a:schemeClr val="accent1"/>
+            </a:fillRef>
+            <a:effectRef idx="0">
               <a:schemeClr val="accent1"/>
             </a:effectRef>
             <a:fontRef idx="minor">
@@ -5362,15 +5405,16 @@
                 <a:srgbClr val="8FBFBF"/>
               </a:solidFill>
             </a:ln>
-          </p:spPr>
-          <p:style>
-            <a:lnRef idx="2">
-              <a:schemeClr val="accent1"/>
-            </a:lnRef>
-            <a:fillRef idx="0">
-              <a:schemeClr val="accent1"/>
-            </a:fillRef>
-            <a:effectRef idx="1">
+            <a:effectLst/>
+          </p:spPr>
+          <p:style>
+            <a:lnRef idx="2">
+              <a:schemeClr val="accent1"/>
+            </a:lnRef>
+            <a:fillRef idx="0">
+              <a:schemeClr val="accent1"/>
+            </a:fillRef>
+            <a:effectRef idx="0">
               <a:schemeClr val="accent1"/>
             </a:effectRef>
             <a:fontRef idx="minor">
@@ -5397,15 +5441,16 @@
                 <a:srgbClr val="8FBFBF"/>
               </a:solidFill>
             </a:ln>
-          </p:spPr>
-          <p:style>
-            <a:lnRef idx="2">
-              <a:schemeClr val="accent1"/>
-            </a:lnRef>
-            <a:fillRef idx="0">
-              <a:schemeClr val="accent1"/>
-            </a:fillRef>
-            <a:effectRef idx="1">
+            <a:effectLst/>
+          </p:spPr>
+          <p:style>
+            <a:lnRef idx="2">
+              <a:schemeClr val="accent1"/>
+            </a:lnRef>
+            <a:fillRef idx="0">
+              <a:schemeClr val="accent1"/>
+            </a:fillRef>
+            <a:effectRef idx="0">
               <a:schemeClr val="accent1"/>
             </a:effectRef>
             <a:fontRef idx="minor">
@@ -5457,7 +5502,7 @@
             <a:fillRef idx="3">
               <a:schemeClr val="accent1"/>
             </a:fillRef>
-            <a:effectRef idx="2">
+            <a:effectRef idx="0">
               <a:schemeClr val="accent1"/>
             </a:effectRef>
             <a:fontRef idx="minor">
@@ -5491,15 +5536,16 @@
                 <a:srgbClr val="8FBFBF"/>
               </a:solidFill>
             </a:ln>
-          </p:spPr>
-          <p:style>
-            <a:lnRef idx="2">
-              <a:schemeClr val="accent1"/>
-            </a:lnRef>
-            <a:fillRef idx="0">
-              <a:schemeClr val="accent1"/>
-            </a:fillRef>
-            <a:effectRef idx="1">
+            <a:effectLst/>
+          </p:spPr>
+          <p:style>
+            <a:lnRef idx="2">
+              <a:schemeClr val="accent1"/>
+            </a:lnRef>
+            <a:fillRef idx="0">
+              <a:schemeClr val="accent1"/>
+            </a:fillRef>
+            <a:effectRef idx="0">
               <a:schemeClr val="accent1"/>
             </a:effectRef>
             <a:fontRef idx="minor">
@@ -5526,15 +5572,16 @@
                 <a:srgbClr val="8FBFBF"/>
               </a:solidFill>
             </a:ln>
-          </p:spPr>
-          <p:style>
-            <a:lnRef idx="2">
-              <a:schemeClr val="accent1"/>
-            </a:lnRef>
-            <a:fillRef idx="0">
-              <a:schemeClr val="accent1"/>
-            </a:fillRef>
-            <a:effectRef idx="1">
+            <a:effectLst/>
+          </p:spPr>
+          <p:style>
+            <a:lnRef idx="2">
+              <a:schemeClr val="accent1"/>
+            </a:lnRef>
+            <a:fillRef idx="0">
+              <a:schemeClr val="accent1"/>
+            </a:fillRef>
+            <a:effectRef idx="0">
               <a:schemeClr val="accent1"/>
             </a:effectRef>
             <a:fontRef idx="minor">
@@ -5561,15 +5608,16 @@
                 <a:srgbClr val="8FBFBF"/>
               </a:solidFill>
             </a:ln>
-          </p:spPr>
-          <p:style>
-            <a:lnRef idx="2">
-              <a:schemeClr val="accent1"/>
-            </a:lnRef>
-            <a:fillRef idx="0">
-              <a:schemeClr val="accent1"/>
-            </a:fillRef>
-            <a:effectRef idx="1">
+            <a:effectLst/>
+          </p:spPr>
+          <p:style>
+            <a:lnRef idx="2">
+              <a:schemeClr val="accent1"/>
+            </a:lnRef>
+            <a:fillRef idx="0">
+              <a:schemeClr val="accent1"/>
+            </a:fillRef>
+            <a:effectRef idx="0">
               <a:schemeClr val="accent1"/>
             </a:effectRef>
             <a:fontRef idx="minor">
@@ -5596,15 +5644,16 @@
                 <a:srgbClr val="8FBFBF"/>
               </a:solidFill>
             </a:ln>
-          </p:spPr>
-          <p:style>
-            <a:lnRef idx="2">
-              <a:schemeClr val="accent1"/>
-            </a:lnRef>
-            <a:fillRef idx="0">
-              <a:schemeClr val="accent1"/>
-            </a:fillRef>
-            <a:effectRef idx="1">
+            <a:effectLst/>
+          </p:spPr>
+          <p:style>
+            <a:lnRef idx="2">
+              <a:schemeClr val="accent1"/>
+            </a:lnRef>
+            <a:fillRef idx="0">
+              <a:schemeClr val="accent1"/>
+            </a:fillRef>
+            <a:effectRef idx="0">
               <a:schemeClr val="accent1"/>
             </a:effectRef>
             <a:fontRef idx="minor">
@@ -5631,15 +5680,16 @@
                 <a:srgbClr val="8FBFBF"/>
               </a:solidFill>
             </a:ln>
-          </p:spPr>
-          <p:style>
-            <a:lnRef idx="2">
-              <a:schemeClr val="accent1"/>
-            </a:lnRef>
-            <a:fillRef idx="0">
-              <a:schemeClr val="accent1"/>
-            </a:fillRef>
-            <a:effectRef idx="1">
+            <a:effectLst/>
+          </p:spPr>
+          <p:style>
+            <a:lnRef idx="2">
+              <a:schemeClr val="accent1"/>
+            </a:lnRef>
+            <a:fillRef idx="0">
+              <a:schemeClr val="accent1"/>
+            </a:fillRef>
+            <a:effectRef idx="0">
               <a:schemeClr val="accent1"/>
             </a:effectRef>
             <a:fontRef idx="minor">
@@ -5666,15 +5716,16 @@
                 <a:srgbClr val="8FBFBF"/>
               </a:solidFill>
             </a:ln>
-          </p:spPr>
-          <p:style>
-            <a:lnRef idx="2">
-              <a:schemeClr val="accent1"/>
-            </a:lnRef>
-            <a:fillRef idx="0">
-              <a:schemeClr val="accent1"/>
-            </a:fillRef>
-            <a:effectRef idx="1">
+            <a:effectLst/>
+          </p:spPr>
+          <p:style>
+            <a:lnRef idx="2">
+              <a:schemeClr val="accent1"/>
+            </a:lnRef>
+            <a:fillRef idx="0">
+              <a:schemeClr val="accent1"/>
+            </a:fillRef>
+            <a:effectRef idx="0">
               <a:schemeClr val="accent1"/>
             </a:effectRef>
             <a:fontRef idx="minor">
@@ -5701,15 +5752,16 @@
                 <a:srgbClr val="8FBFBF"/>
               </a:solidFill>
             </a:ln>
-          </p:spPr>
-          <p:style>
-            <a:lnRef idx="2">
-              <a:schemeClr val="accent1"/>
-            </a:lnRef>
-            <a:fillRef idx="0">
-              <a:schemeClr val="accent1"/>
-            </a:fillRef>
-            <a:effectRef idx="1">
+            <a:effectLst/>
+          </p:spPr>
+          <p:style>
+            <a:lnRef idx="2">
+              <a:schemeClr val="accent1"/>
+            </a:lnRef>
+            <a:fillRef idx="0">
+              <a:schemeClr val="accent1"/>
+            </a:fillRef>
+            <a:effectRef idx="0">
               <a:schemeClr val="accent1"/>
             </a:effectRef>
             <a:fontRef idx="minor">
@@ -5736,15 +5788,16 @@
                 <a:srgbClr val="8FBFBF"/>
               </a:solidFill>
             </a:ln>
-          </p:spPr>
-          <p:style>
-            <a:lnRef idx="2">
-              <a:schemeClr val="accent1"/>
-            </a:lnRef>
-            <a:fillRef idx="0">
-              <a:schemeClr val="accent1"/>
-            </a:fillRef>
-            <a:effectRef idx="1">
+            <a:effectLst/>
+          </p:spPr>
+          <p:style>
+            <a:lnRef idx="2">
+              <a:schemeClr val="accent1"/>
+            </a:lnRef>
+            <a:fillRef idx="0">
+              <a:schemeClr val="accent1"/>
+            </a:fillRef>
+            <a:effectRef idx="0">
               <a:schemeClr val="accent1"/>
             </a:effectRef>
             <a:fontRef idx="minor">
@@ -5771,15 +5824,16 @@
                 <a:srgbClr val="8FBFBF"/>
               </a:solidFill>
             </a:ln>
-          </p:spPr>
-          <p:style>
-            <a:lnRef idx="2">
-              <a:schemeClr val="accent1"/>
-            </a:lnRef>
-            <a:fillRef idx="0">
-              <a:schemeClr val="accent1"/>
-            </a:fillRef>
-            <a:effectRef idx="1">
+            <a:effectLst/>
+          </p:spPr>
+          <p:style>
+            <a:lnRef idx="2">
+              <a:schemeClr val="accent1"/>
+            </a:lnRef>
+            <a:fillRef idx="0">
+              <a:schemeClr val="accent1"/>
+            </a:fillRef>
+            <a:effectRef idx="0">
               <a:schemeClr val="accent1"/>
             </a:effectRef>
             <a:fontRef idx="minor">
@@ -5806,15 +5860,16 @@
                 <a:srgbClr val="8FBFBF"/>
               </a:solidFill>
             </a:ln>
-          </p:spPr>
-          <p:style>
-            <a:lnRef idx="2">
-              <a:schemeClr val="accent1"/>
-            </a:lnRef>
-            <a:fillRef idx="0">
-              <a:schemeClr val="accent1"/>
-            </a:fillRef>
-            <a:effectRef idx="1">
+            <a:effectLst/>
+          </p:spPr>
+          <p:style>
+            <a:lnRef idx="2">
+              <a:schemeClr val="accent1"/>
+            </a:lnRef>
+            <a:fillRef idx="0">
+              <a:schemeClr val="accent1"/>
+            </a:fillRef>
+            <a:effectRef idx="0">
               <a:schemeClr val="accent1"/>
             </a:effectRef>
             <a:fontRef idx="minor">
@@ -5841,15 +5896,16 @@
                 <a:srgbClr val="8FBFBF"/>
               </a:solidFill>
             </a:ln>
-          </p:spPr>
-          <p:style>
-            <a:lnRef idx="2">
-              <a:schemeClr val="accent1"/>
-            </a:lnRef>
-            <a:fillRef idx="0">
-              <a:schemeClr val="accent1"/>
-            </a:fillRef>
-            <a:effectRef idx="1">
+            <a:effectLst/>
+          </p:spPr>
+          <p:style>
+            <a:lnRef idx="2">
+              <a:schemeClr val="accent1"/>
+            </a:lnRef>
+            <a:fillRef idx="0">
+              <a:schemeClr val="accent1"/>
+            </a:fillRef>
+            <a:effectRef idx="0">
               <a:schemeClr val="accent1"/>
             </a:effectRef>
             <a:fontRef idx="minor">
@@ -5901,7 +5957,7 @@
             <a:fillRef idx="3">
               <a:schemeClr val="accent1"/>
             </a:fillRef>
-            <a:effectRef idx="2">
+            <a:effectRef idx="0">
               <a:schemeClr val="accent1"/>
             </a:effectRef>
             <a:fontRef idx="minor">
@@ -5935,15 +5991,16 @@
                 <a:srgbClr val="8FBFBF"/>
               </a:solidFill>
             </a:ln>
-          </p:spPr>
-          <p:style>
-            <a:lnRef idx="2">
-              <a:schemeClr val="accent1"/>
-            </a:lnRef>
-            <a:fillRef idx="0">
-              <a:schemeClr val="accent1"/>
-            </a:fillRef>
-            <a:effectRef idx="1">
+            <a:effectLst/>
+          </p:spPr>
+          <p:style>
+            <a:lnRef idx="2">
+              <a:schemeClr val="accent1"/>
+            </a:lnRef>
+            <a:fillRef idx="0">
+              <a:schemeClr val="accent1"/>
+            </a:fillRef>
+            <a:effectRef idx="0">
               <a:schemeClr val="accent1"/>
             </a:effectRef>
             <a:fontRef idx="minor">
@@ -5970,15 +6027,16 @@
                 <a:srgbClr val="8FBFBF"/>
               </a:solidFill>
             </a:ln>
-          </p:spPr>
-          <p:style>
-            <a:lnRef idx="2">
-              <a:schemeClr val="accent1"/>
-            </a:lnRef>
-            <a:fillRef idx="0">
-              <a:schemeClr val="accent1"/>
-            </a:fillRef>
-            <a:effectRef idx="1">
+            <a:effectLst/>
+          </p:spPr>
+          <p:style>
+            <a:lnRef idx="2">
+              <a:schemeClr val="accent1"/>
+            </a:lnRef>
+            <a:fillRef idx="0">
+              <a:schemeClr val="accent1"/>
+            </a:fillRef>
+            <a:effectRef idx="0">
               <a:schemeClr val="accent1"/>
             </a:effectRef>
             <a:fontRef idx="minor">
@@ -6005,15 +6063,16 @@
                 <a:srgbClr val="8FBFBF"/>
               </a:solidFill>
             </a:ln>
-          </p:spPr>
-          <p:style>
-            <a:lnRef idx="2">
-              <a:schemeClr val="accent1"/>
-            </a:lnRef>
-            <a:fillRef idx="0">
-              <a:schemeClr val="accent1"/>
-            </a:fillRef>
-            <a:effectRef idx="1">
+            <a:effectLst/>
+          </p:spPr>
+          <p:style>
+            <a:lnRef idx="2">
+              <a:schemeClr val="accent1"/>
+            </a:lnRef>
+            <a:fillRef idx="0">
+              <a:schemeClr val="accent1"/>
+            </a:fillRef>
+            <a:effectRef idx="0">
               <a:schemeClr val="accent1"/>
             </a:effectRef>
             <a:fontRef idx="minor">
@@ -6040,15 +6099,16 @@
                 <a:srgbClr val="8FBFBF"/>
               </a:solidFill>
             </a:ln>
-          </p:spPr>
-          <p:style>
-            <a:lnRef idx="2">
-              <a:schemeClr val="accent1"/>
-            </a:lnRef>
-            <a:fillRef idx="0">
-              <a:schemeClr val="accent1"/>
-            </a:fillRef>
-            <a:effectRef idx="1">
+            <a:effectLst/>
+          </p:spPr>
+          <p:style>
+            <a:lnRef idx="2">
+              <a:schemeClr val="accent1"/>
+            </a:lnRef>
+            <a:fillRef idx="0">
+              <a:schemeClr val="accent1"/>
+            </a:fillRef>
+            <a:effectRef idx="0">
               <a:schemeClr val="accent1"/>
             </a:effectRef>
             <a:fontRef idx="minor">
@@ -6075,15 +6135,16 @@
                 <a:srgbClr val="8FBFBF"/>
               </a:solidFill>
             </a:ln>
-          </p:spPr>
-          <p:style>
-            <a:lnRef idx="2">
-              <a:schemeClr val="accent1"/>
-            </a:lnRef>
-            <a:fillRef idx="0">
-              <a:schemeClr val="accent1"/>
-            </a:fillRef>
-            <a:effectRef idx="1">
+            <a:effectLst/>
+          </p:spPr>
+          <p:style>
+            <a:lnRef idx="2">
+              <a:schemeClr val="accent1"/>
+            </a:lnRef>
+            <a:fillRef idx="0">
+              <a:schemeClr val="accent1"/>
+            </a:fillRef>
+            <a:effectRef idx="0">
               <a:schemeClr val="accent1"/>
             </a:effectRef>
             <a:fontRef idx="minor">
@@ -6110,15 +6171,16 @@
                 <a:srgbClr val="8FBFBF"/>
               </a:solidFill>
             </a:ln>
-          </p:spPr>
-          <p:style>
-            <a:lnRef idx="2">
-              <a:schemeClr val="accent1"/>
-            </a:lnRef>
-            <a:fillRef idx="0">
-              <a:schemeClr val="accent1"/>
-            </a:fillRef>
-            <a:effectRef idx="1">
+            <a:effectLst/>
+          </p:spPr>
+          <p:style>
+            <a:lnRef idx="2">
+              <a:schemeClr val="accent1"/>
+            </a:lnRef>
+            <a:fillRef idx="0">
+              <a:schemeClr val="accent1"/>
+            </a:fillRef>
+            <a:effectRef idx="0">
               <a:schemeClr val="accent1"/>
             </a:effectRef>
             <a:fontRef idx="minor">
@@ -6145,15 +6207,16 @@
                 <a:srgbClr val="8FBFBF"/>
               </a:solidFill>
             </a:ln>
-          </p:spPr>
-          <p:style>
-            <a:lnRef idx="2">
-              <a:schemeClr val="accent1"/>
-            </a:lnRef>
-            <a:fillRef idx="0">
-              <a:schemeClr val="accent1"/>
-            </a:fillRef>
-            <a:effectRef idx="1">
+            <a:effectLst/>
+          </p:spPr>
+          <p:style>
+            <a:lnRef idx="2">
+              <a:schemeClr val="accent1"/>
+            </a:lnRef>
+            <a:fillRef idx="0">
+              <a:schemeClr val="accent1"/>
+            </a:fillRef>
+            <a:effectRef idx="0">
               <a:schemeClr val="accent1"/>
             </a:effectRef>
             <a:fontRef idx="minor">
@@ -6180,15 +6243,16 @@
                 <a:srgbClr val="8FBFBF"/>
               </a:solidFill>
             </a:ln>
-          </p:spPr>
-          <p:style>
-            <a:lnRef idx="2">
-              <a:schemeClr val="accent1"/>
-            </a:lnRef>
-            <a:fillRef idx="0">
-              <a:schemeClr val="accent1"/>
-            </a:fillRef>
-            <a:effectRef idx="1">
+            <a:effectLst/>
+          </p:spPr>
+          <p:style>
+            <a:lnRef idx="2">
+              <a:schemeClr val="accent1"/>
+            </a:lnRef>
+            <a:fillRef idx="0">
+              <a:schemeClr val="accent1"/>
+            </a:fillRef>
+            <a:effectRef idx="0">
               <a:schemeClr val="accent1"/>
             </a:effectRef>
             <a:fontRef idx="minor">
@@ -6215,15 +6279,16 @@
                 <a:srgbClr val="8FBFBF"/>
               </a:solidFill>
             </a:ln>
-          </p:spPr>
-          <p:style>
-            <a:lnRef idx="2">
-              <a:schemeClr val="accent1"/>
-            </a:lnRef>
-            <a:fillRef idx="0">
-              <a:schemeClr val="accent1"/>
-            </a:fillRef>
-            <a:effectRef idx="1">
+            <a:effectLst/>
+          </p:spPr>
+          <p:style>
+            <a:lnRef idx="2">
+              <a:schemeClr val="accent1"/>
+            </a:lnRef>
+            <a:fillRef idx="0">
+              <a:schemeClr val="accent1"/>
+            </a:fillRef>
+            <a:effectRef idx="0">
               <a:schemeClr val="accent1"/>
             </a:effectRef>
             <a:fontRef idx="minor">
@@ -6250,15 +6315,16 @@
                 <a:srgbClr val="8FBFBF"/>
               </a:solidFill>
             </a:ln>
-          </p:spPr>
-          <p:style>
-            <a:lnRef idx="2">
-              <a:schemeClr val="accent1"/>
-            </a:lnRef>
-            <a:fillRef idx="0">
-              <a:schemeClr val="accent1"/>
-            </a:fillRef>
-            <a:effectRef idx="1">
+            <a:effectLst/>
+          </p:spPr>
+          <p:style>
+            <a:lnRef idx="2">
+              <a:schemeClr val="accent1"/>
+            </a:lnRef>
+            <a:fillRef idx="0">
+              <a:schemeClr val="accent1"/>
+            </a:fillRef>
+            <a:effectRef idx="0">
               <a:schemeClr val="accent1"/>
             </a:effectRef>
             <a:fontRef idx="minor">
@@ -6285,15 +6351,16 @@
                 <a:srgbClr val="8FBFBF"/>
               </a:solidFill>
             </a:ln>
-          </p:spPr>
-          <p:style>
-            <a:lnRef idx="2">
-              <a:schemeClr val="accent1"/>
-            </a:lnRef>
-            <a:fillRef idx="0">
-              <a:schemeClr val="accent1"/>
-            </a:fillRef>
-            <a:effectRef idx="1">
+            <a:effectLst/>
+          </p:spPr>
+          <p:style>
+            <a:lnRef idx="2">
+              <a:schemeClr val="accent1"/>
+            </a:lnRef>
+            <a:fillRef idx="0">
+              <a:schemeClr val="accent1"/>
+            </a:fillRef>
+            <a:effectRef idx="0">
               <a:schemeClr val="accent1"/>
             </a:effectRef>
             <a:fontRef idx="minor">
@@ -6345,7 +6412,7 @@
             <a:fillRef idx="3">
               <a:schemeClr val="accent1"/>
             </a:fillRef>
-            <a:effectRef idx="2">
+            <a:effectRef idx="0">
               <a:schemeClr val="accent1"/>
             </a:effectRef>
             <a:fontRef idx="minor">
@@ -6379,15 +6446,16 @@
                 <a:srgbClr val="8FBFBF"/>
               </a:solidFill>
             </a:ln>
-          </p:spPr>
-          <p:style>
-            <a:lnRef idx="2">
-              <a:schemeClr val="accent1"/>
-            </a:lnRef>
-            <a:fillRef idx="0">
-              <a:schemeClr val="accent1"/>
-            </a:fillRef>
-            <a:effectRef idx="1">
+            <a:effectLst/>
+          </p:spPr>
+          <p:style>
+            <a:lnRef idx="2">
+              <a:schemeClr val="accent1"/>
+            </a:lnRef>
+            <a:fillRef idx="0">
+              <a:schemeClr val="accent1"/>
+            </a:fillRef>
+            <a:effectRef idx="0">
               <a:schemeClr val="accent1"/>
             </a:effectRef>
             <a:fontRef idx="minor">
@@ -6414,15 +6482,16 @@
                 <a:srgbClr val="8FBFBF"/>
               </a:solidFill>
             </a:ln>
-          </p:spPr>
-          <p:style>
-            <a:lnRef idx="2">
-              <a:schemeClr val="accent1"/>
-            </a:lnRef>
-            <a:fillRef idx="0">
-              <a:schemeClr val="accent1"/>
-            </a:fillRef>
-            <a:effectRef idx="1">
+            <a:effectLst/>
+          </p:spPr>
+          <p:style>
+            <a:lnRef idx="2">
+              <a:schemeClr val="accent1"/>
+            </a:lnRef>
+            <a:fillRef idx="0">
+              <a:schemeClr val="accent1"/>
+            </a:fillRef>
+            <a:effectRef idx="0">
               <a:schemeClr val="accent1"/>
             </a:effectRef>
             <a:fontRef idx="minor">
@@ -6449,15 +6518,16 @@
                 <a:srgbClr val="8FBFBF"/>
               </a:solidFill>
             </a:ln>
-          </p:spPr>
-          <p:style>
-            <a:lnRef idx="2">
-              <a:schemeClr val="accent1"/>
-            </a:lnRef>
-            <a:fillRef idx="0">
-              <a:schemeClr val="accent1"/>
-            </a:fillRef>
-            <a:effectRef idx="1">
+            <a:effectLst/>
+          </p:spPr>
+          <p:style>
+            <a:lnRef idx="2">
+              <a:schemeClr val="accent1"/>
+            </a:lnRef>
+            <a:fillRef idx="0">
+              <a:schemeClr val="accent1"/>
+            </a:fillRef>
+            <a:effectRef idx="0">
               <a:schemeClr val="accent1"/>
             </a:effectRef>
             <a:fontRef idx="minor">
@@ -6484,15 +6554,16 @@
                 <a:srgbClr val="8FBFBF"/>
               </a:solidFill>
             </a:ln>
-          </p:spPr>
-          <p:style>
-            <a:lnRef idx="2">
-              <a:schemeClr val="accent1"/>
-            </a:lnRef>
-            <a:fillRef idx="0">
-              <a:schemeClr val="accent1"/>
-            </a:fillRef>
-            <a:effectRef idx="1">
+            <a:effectLst/>
+          </p:spPr>
+          <p:style>
+            <a:lnRef idx="2">
+              <a:schemeClr val="accent1"/>
+            </a:lnRef>
+            <a:fillRef idx="0">
+              <a:schemeClr val="accent1"/>
+            </a:fillRef>
+            <a:effectRef idx="0">
               <a:schemeClr val="accent1"/>
             </a:effectRef>
             <a:fontRef idx="minor">
@@ -6519,15 +6590,16 @@
                 <a:srgbClr val="8FBFBF"/>
               </a:solidFill>
             </a:ln>
-          </p:spPr>
-          <p:style>
-            <a:lnRef idx="2">
-              <a:schemeClr val="accent1"/>
-            </a:lnRef>
-            <a:fillRef idx="0">
-              <a:schemeClr val="accent1"/>
-            </a:fillRef>
-            <a:effectRef idx="1">
+            <a:effectLst/>
+          </p:spPr>
+          <p:style>
+            <a:lnRef idx="2">
+              <a:schemeClr val="accent1"/>
+            </a:lnRef>
+            <a:fillRef idx="0">
+              <a:schemeClr val="accent1"/>
+            </a:fillRef>
+            <a:effectRef idx="0">
               <a:schemeClr val="accent1"/>
             </a:effectRef>
             <a:fontRef idx="minor">
@@ -6554,15 +6626,16 @@
                 <a:srgbClr val="8FBFBF"/>
               </a:solidFill>
             </a:ln>
-          </p:spPr>
-          <p:style>
-            <a:lnRef idx="2">
-              <a:schemeClr val="accent1"/>
-            </a:lnRef>
-            <a:fillRef idx="0">
-              <a:schemeClr val="accent1"/>
-            </a:fillRef>
-            <a:effectRef idx="1">
+            <a:effectLst/>
+          </p:spPr>
+          <p:style>
+            <a:lnRef idx="2">
+              <a:schemeClr val="accent1"/>
+            </a:lnRef>
+            <a:fillRef idx="0">
+              <a:schemeClr val="accent1"/>
+            </a:fillRef>
+            <a:effectRef idx="0">
               <a:schemeClr val="accent1"/>
             </a:effectRef>
             <a:fontRef idx="minor">
@@ -6589,15 +6662,16 @@
                 <a:srgbClr val="8FBFBF"/>
               </a:solidFill>
             </a:ln>
-          </p:spPr>
-          <p:style>
-            <a:lnRef idx="2">
-              <a:schemeClr val="accent1"/>
-            </a:lnRef>
-            <a:fillRef idx="0">
-              <a:schemeClr val="accent1"/>
-            </a:fillRef>
-            <a:effectRef idx="1">
+            <a:effectLst/>
+          </p:spPr>
+          <p:style>
+            <a:lnRef idx="2">
+              <a:schemeClr val="accent1"/>
+            </a:lnRef>
+            <a:fillRef idx="0">
+              <a:schemeClr val="accent1"/>
+            </a:fillRef>
+            <a:effectRef idx="0">
               <a:schemeClr val="accent1"/>
             </a:effectRef>
             <a:fontRef idx="minor">
@@ -6624,15 +6698,16 @@
                 <a:srgbClr val="8FBFBF"/>
               </a:solidFill>
             </a:ln>
-          </p:spPr>
-          <p:style>
-            <a:lnRef idx="2">
-              <a:schemeClr val="accent1"/>
-            </a:lnRef>
-            <a:fillRef idx="0">
-              <a:schemeClr val="accent1"/>
-            </a:fillRef>
-            <a:effectRef idx="1">
+            <a:effectLst/>
+          </p:spPr>
+          <p:style>
+            <a:lnRef idx="2">
+              <a:schemeClr val="accent1"/>
+            </a:lnRef>
+            <a:fillRef idx="0">
+              <a:schemeClr val="accent1"/>
+            </a:fillRef>
+            <a:effectRef idx="0">
               <a:schemeClr val="accent1"/>
             </a:effectRef>
             <a:fontRef idx="minor">
@@ -6659,15 +6734,16 @@
                 <a:srgbClr val="8FBFBF"/>
               </a:solidFill>
             </a:ln>
-          </p:spPr>
-          <p:style>
-            <a:lnRef idx="2">
-              <a:schemeClr val="accent1"/>
-            </a:lnRef>
-            <a:fillRef idx="0">
-              <a:schemeClr val="accent1"/>
-            </a:fillRef>
-            <a:effectRef idx="1">
+            <a:effectLst/>
+          </p:spPr>
+          <p:style>
+            <a:lnRef idx="2">
+              <a:schemeClr val="accent1"/>
+            </a:lnRef>
+            <a:fillRef idx="0">
+              <a:schemeClr val="accent1"/>
+            </a:fillRef>
+            <a:effectRef idx="0">
               <a:schemeClr val="accent1"/>
             </a:effectRef>
             <a:fontRef idx="minor">
@@ -6694,15 +6770,16 @@
                 <a:srgbClr val="8FBFBF"/>
               </a:solidFill>
             </a:ln>
-          </p:spPr>
-          <p:style>
-            <a:lnRef idx="2">
-              <a:schemeClr val="accent1"/>
-            </a:lnRef>
-            <a:fillRef idx="0">
-              <a:schemeClr val="accent1"/>
-            </a:fillRef>
-            <a:effectRef idx="1">
+            <a:effectLst/>
+          </p:spPr>
+          <p:style>
+            <a:lnRef idx="2">
+              <a:schemeClr val="accent1"/>
+            </a:lnRef>
+            <a:fillRef idx="0">
+              <a:schemeClr val="accent1"/>
+            </a:fillRef>
+            <a:effectRef idx="0">
               <a:schemeClr val="accent1"/>
             </a:effectRef>
             <a:fontRef idx="minor">
@@ -6729,15 +6806,16 @@
                 <a:srgbClr val="8FBFBF"/>
               </a:solidFill>
             </a:ln>
-          </p:spPr>
-          <p:style>
-            <a:lnRef idx="2">
-              <a:schemeClr val="accent1"/>
-            </a:lnRef>
-            <a:fillRef idx="0">
-              <a:schemeClr val="accent1"/>
-            </a:fillRef>
-            <a:effectRef idx="1">
+            <a:effectLst/>
+          </p:spPr>
+          <p:style>
+            <a:lnRef idx="2">
+              <a:schemeClr val="accent1"/>
+            </a:lnRef>
+            <a:fillRef idx="0">
+              <a:schemeClr val="accent1"/>
+            </a:fillRef>
+            <a:effectRef idx="0">
               <a:schemeClr val="accent1"/>
             </a:effectRef>
             <a:fontRef idx="minor">
@@ -6789,7 +6867,7 @@
             <a:fillRef idx="3">
               <a:schemeClr val="accent1"/>
             </a:fillRef>
-            <a:effectRef idx="2">
+            <a:effectRef idx="0">
               <a:schemeClr val="accent1"/>
             </a:effectRef>
             <a:fontRef idx="minor">
@@ -6823,15 +6901,16 @@
                 <a:srgbClr val="8FBFBF"/>
               </a:solidFill>
             </a:ln>
-          </p:spPr>
-          <p:style>
-            <a:lnRef idx="2">
-              <a:schemeClr val="accent1"/>
-            </a:lnRef>
-            <a:fillRef idx="0">
-              <a:schemeClr val="accent1"/>
-            </a:fillRef>
-            <a:effectRef idx="1">
+            <a:effectLst/>
+          </p:spPr>
+          <p:style>
+            <a:lnRef idx="2">
+              <a:schemeClr val="accent1"/>
+            </a:lnRef>
+            <a:fillRef idx="0">
+              <a:schemeClr val="accent1"/>
+            </a:fillRef>
+            <a:effectRef idx="0">
               <a:schemeClr val="accent1"/>
             </a:effectRef>
             <a:fontRef idx="minor">
@@ -6858,15 +6937,16 @@
                 <a:srgbClr val="8FBFBF"/>
               </a:solidFill>
             </a:ln>
-          </p:spPr>
-          <p:style>
-            <a:lnRef idx="2">
-              <a:schemeClr val="accent1"/>
-            </a:lnRef>
-            <a:fillRef idx="0">
-              <a:schemeClr val="accent1"/>
-            </a:fillRef>
-            <a:effectRef idx="1">
+            <a:effectLst/>
+          </p:spPr>
+          <p:style>
+            <a:lnRef idx="2">
+              <a:schemeClr val="accent1"/>
+            </a:lnRef>
+            <a:fillRef idx="0">
+              <a:schemeClr val="accent1"/>
+            </a:fillRef>
+            <a:effectRef idx="0">
               <a:schemeClr val="accent1"/>
             </a:effectRef>
             <a:fontRef idx="minor">
@@ -6893,15 +6973,16 @@
                 <a:srgbClr val="8FBFBF"/>
               </a:solidFill>
             </a:ln>
-          </p:spPr>
-          <p:style>
-            <a:lnRef idx="2">
-              <a:schemeClr val="accent1"/>
-            </a:lnRef>
-            <a:fillRef idx="0">
-              <a:schemeClr val="accent1"/>
-            </a:fillRef>
-            <a:effectRef idx="1">
+            <a:effectLst/>
+          </p:spPr>
+          <p:style>
+            <a:lnRef idx="2">
+              <a:schemeClr val="accent1"/>
+            </a:lnRef>
+            <a:fillRef idx="0">
+              <a:schemeClr val="accent1"/>
+            </a:fillRef>
+            <a:effectRef idx="0">
               <a:schemeClr val="accent1"/>
             </a:effectRef>
             <a:fontRef idx="minor">
@@ -6928,15 +7009,16 @@
                 <a:srgbClr val="8FBFBF"/>
               </a:solidFill>
             </a:ln>
-          </p:spPr>
-          <p:style>
-            <a:lnRef idx="2">
-              <a:schemeClr val="accent1"/>
-            </a:lnRef>
-            <a:fillRef idx="0">
-              <a:schemeClr val="accent1"/>
-            </a:fillRef>
-            <a:effectRef idx="1">
+            <a:effectLst/>
+          </p:spPr>
+          <p:style>
+            <a:lnRef idx="2">
+              <a:schemeClr val="accent1"/>
+            </a:lnRef>
+            <a:fillRef idx="0">
+              <a:schemeClr val="accent1"/>
+            </a:fillRef>
+            <a:effectRef idx="0">
               <a:schemeClr val="accent1"/>
             </a:effectRef>
             <a:fontRef idx="minor">
@@ -6963,15 +7045,16 @@
                 <a:srgbClr val="8FBFBF"/>
               </a:solidFill>
             </a:ln>
-          </p:spPr>
-          <p:style>
-            <a:lnRef idx="2">
-              <a:schemeClr val="accent1"/>
-            </a:lnRef>
-            <a:fillRef idx="0">
-              <a:schemeClr val="accent1"/>
-            </a:fillRef>
-            <a:effectRef idx="1">
+            <a:effectLst/>
+          </p:spPr>
+          <p:style>
+            <a:lnRef idx="2">
+              <a:schemeClr val="accent1"/>
+            </a:lnRef>
+            <a:fillRef idx="0">
+              <a:schemeClr val="accent1"/>
+            </a:fillRef>
+            <a:effectRef idx="0">
               <a:schemeClr val="accent1"/>
             </a:effectRef>
             <a:fontRef idx="minor">
@@ -6998,15 +7081,16 @@
                 <a:srgbClr val="8FBFBF"/>
               </a:solidFill>
             </a:ln>
-          </p:spPr>
-          <p:style>
-            <a:lnRef idx="2">
-              <a:schemeClr val="accent1"/>
-            </a:lnRef>
-            <a:fillRef idx="0">
-              <a:schemeClr val="accent1"/>
-            </a:fillRef>
-            <a:effectRef idx="1">
+            <a:effectLst/>
+          </p:spPr>
+          <p:style>
+            <a:lnRef idx="2">
+              <a:schemeClr val="accent1"/>
+            </a:lnRef>
+            <a:fillRef idx="0">
+              <a:schemeClr val="accent1"/>
+            </a:fillRef>
+            <a:effectRef idx="0">
               <a:schemeClr val="accent1"/>
             </a:effectRef>
             <a:fontRef idx="minor">
@@ -7033,15 +7117,16 @@
                 <a:srgbClr val="8FBFBF"/>
               </a:solidFill>
             </a:ln>
-          </p:spPr>
-          <p:style>
-            <a:lnRef idx="2">
-              <a:schemeClr val="accent1"/>
-            </a:lnRef>
-            <a:fillRef idx="0">
-              <a:schemeClr val="accent1"/>
-            </a:fillRef>
-            <a:effectRef idx="1">
+            <a:effectLst/>
+          </p:spPr>
+          <p:style>
+            <a:lnRef idx="2">
+              <a:schemeClr val="accent1"/>
+            </a:lnRef>
+            <a:fillRef idx="0">
+              <a:schemeClr val="accent1"/>
+            </a:fillRef>
+            <a:effectRef idx="0">
               <a:schemeClr val="accent1"/>
             </a:effectRef>
             <a:fontRef idx="minor">
@@ -7068,15 +7153,16 @@
                 <a:srgbClr val="8FBFBF"/>
               </a:solidFill>
             </a:ln>
-          </p:spPr>
-          <p:style>
-            <a:lnRef idx="2">
-              <a:schemeClr val="accent1"/>
-            </a:lnRef>
-            <a:fillRef idx="0">
-              <a:schemeClr val="accent1"/>
-            </a:fillRef>
-            <a:effectRef idx="1">
+            <a:effectLst/>
+          </p:spPr>
+          <p:style>
+            <a:lnRef idx="2">
+              <a:schemeClr val="accent1"/>
+            </a:lnRef>
+            <a:fillRef idx="0">
+              <a:schemeClr val="accent1"/>
+            </a:fillRef>
+            <a:effectRef idx="0">
               <a:schemeClr val="accent1"/>
             </a:effectRef>
             <a:fontRef idx="minor">
@@ -7103,15 +7189,16 @@
                 <a:srgbClr val="8FBFBF"/>
               </a:solidFill>
             </a:ln>
-          </p:spPr>
-          <p:style>
-            <a:lnRef idx="2">
-              <a:schemeClr val="accent1"/>
-            </a:lnRef>
-            <a:fillRef idx="0">
-              <a:schemeClr val="accent1"/>
-            </a:fillRef>
-            <a:effectRef idx="1">
+            <a:effectLst/>
+          </p:spPr>
+          <p:style>
+            <a:lnRef idx="2">
+              <a:schemeClr val="accent1"/>
+            </a:lnRef>
+            <a:fillRef idx="0">
+              <a:schemeClr val="accent1"/>
+            </a:fillRef>
+            <a:effectRef idx="0">
               <a:schemeClr val="accent1"/>
             </a:effectRef>
             <a:fontRef idx="minor">
@@ -7138,15 +7225,16 @@
                 <a:srgbClr val="8FBFBF"/>
               </a:solidFill>
             </a:ln>
-          </p:spPr>
-          <p:style>
-            <a:lnRef idx="2">
-              <a:schemeClr val="accent1"/>
-            </a:lnRef>
-            <a:fillRef idx="0">
-              <a:schemeClr val="accent1"/>
-            </a:fillRef>
-            <a:effectRef idx="1">
+            <a:effectLst/>
+          </p:spPr>
+          <p:style>
+            <a:lnRef idx="2">
+              <a:schemeClr val="accent1"/>
+            </a:lnRef>
+            <a:fillRef idx="0">
+              <a:schemeClr val="accent1"/>
+            </a:fillRef>
+            <a:effectRef idx="0">
               <a:schemeClr val="accent1"/>
             </a:effectRef>
             <a:fontRef idx="minor">
@@ -7173,15 +7261,16 @@
                 <a:srgbClr val="8FBFBF"/>
               </a:solidFill>
             </a:ln>
-          </p:spPr>
-          <p:style>
-            <a:lnRef idx="2">
-              <a:schemeClr val="accent1"/>
-            </a:lnRef>
-            <a:fillRef idx="0">
-              <a:schemeClr val="accent1"/>
-            </a:fillRef>
-            <a:effectRef idx="1">
+            <a:effectLst/>
+          </p:spPr>
+          <p:style>
+            <a:lnRef idx="2">
+              <a:schemeClr val="accent1"/>
+            </a:lnRef>
+            <a:fillRef idx="0">
+              <a:schemeClr val="accent1"/>
+            </a:fillRef>
+            <a:effectRef idx="0">
               <a:schemeClr val="accent1"/>
             </a:effectRef>
             <a:fontRef idx="minor">
@@ -7233,7 +7322,7 @@
             <a:fillRef idx="3">
               <a:schemeClr val="accent1"/>
             </a:fillRef>
-            <a:effectRef idx="2">
+            <a:effectRef idx="0">
               <a:schemeClr val="accent1"/>
             </a:effectRef>
             <a:fontRef idx="minor">
@@ -7267,15 +7356,16 @@
                 <a:srgbClr val="8FBFBF"/>
               </a:solidFill>
             </a:ln>
-          </p:spPr>
-          <p:style>
-            <a:lnRef idx="2">
-              <a:schemeClr val="accent1"/>
-            </a:lnRef>
-            <a:fillRef idx="0">
-              <a:schemeClr val="accent1"/>
-            </a:fillRef>
-            <a:effectRef idx="1">
+            <a:effectLst/>
+          </p:spPr>
+          <p:style>
+            <a:lnRef idx="2">
+              <a:schemeClr val="accent1"/>
+            </a:lnRef>
+            <a:fillRef idx="0">
+              <a:schemeClr val="accent1"/>
+            </a:fillRef>
+            <a:effectRef idx="0">
               <a:schemeClr val="accent1"/>
             </a:effectRef>
             <a:fontRef idx="minor">
@@ -7302,15 +7392,16 @@
                 <a:srgbClr val="8FBFBF"/>
               </a:solidFill>
             </a:ln>
-          </p:spPr>
-          <p:style>
-            <a:lnRef idx="2">
-              <a:schemeClr val="accent1"/>
-            </a:lnRef>
-            <a:fillRef idx="0">
-              <a:schemeClr val="accent1"/>
-            </a:fillRef>
-            <a:effectRef idx="1">
+            <a:effectLst/>
+          </p:spPr>
+          <p:style>
+            <a:lnRef idx="2">
+              <a:schemeClr val="accent1"/>
+            </a:lnRef>
+            <a:fillRef idx="0">
+              <a:schemeClr val="accent1"/>
+            </a:fillRef>
+            <a:effectRef idx="0">
               <a:schemeClr val="accent1"/>
             </a:effectRef>
             <a:fontRef idx="minor">
@@ -7337,15 +7428,16 @@
                 <a:srgbClr val="8FBFBF"/>
               </a:solidFill>
             </a:ln>
-          </p:spPr>
-          <p:style>
-            <a:lnRef idx="2">
-              <a:schemeClr val="accent1"/>
-            </a:lnRef>
-            <a:fillRef idx="0">
-              <a:schemeClr val="accent1"/>
-            </a:fillRef>
-            <a:effectRef idx="1">
+            <a:effectLst/>
+          </p:spPr>
+          <p:style>
+            <a:lnRef idx="2">
+              <a:schemeClr val="accent1"/>
+            </a:lnRef>
+            <a:fillRef idx="0">
+              <a:schemeClr val="accent1"/>
+            </a:fillRef>
+            <a:effectRef idx="0">
               <a:schemeClr val="accent1"/>
             </a:effectRef>
             <a:fontRef idx="minor">
@@ -7372,15 +7464,16 @@
                 <a:srgbClr val="8FBFBF"/>
               </a:solidFill>
             </a:ln>
-          </p:spPr>
-          <p:style>
-            <a:lnRef idx="2">
-              <a:schemeClr val="accent1"/>
-            </a:lnRef>
-            <a:fillRef idx="0">
-              <a:schemeClr val="accent1"/>
-            </a:fillRef>
-            <a:effectRef idx="1">
+            <a:effectLst/>
+          </p:spPr>
+          <p:style>
+            <a:lnRef idx="2">
+              <a:schemeClr val="accent1"/>
+            </a:lnRef>
+            <a:fillRef idx="0">
+              <a:schemeClr val="accent1"/>
+            </a:fillRef>
+            <a:effectRef idx="0">
               <a:schemeClr val="accent1"/>
             </a:effectRef>
             <a:fontRef idx="minor">
@@ -7407,15 +7500,16 @@
                 <a:srgbClr val="8FBFBF"/>
               </a:solidFill>
             </a:ln>
-          </p:spPr>
-          <p:style>
-            <a:lnRef idx="2">
-              <a:schemeClr val="accent1"/>
-            </a:lnRef>
-            <a:fillRef idx="0">
-              <a:schemeClr val="accent1"/>
-            </a:fillRef>
-            <a:effectRef idx="1">
+            <a:effectLst/>
+          </p:spPr>
+          <p:style>
+            <a:lnRef idx="2">
+              <a:schemeClr val="accent1"/>
+            </a:lnRef>
+            <a:fillRef idx="0">
+              <a:schemeClr val="accent1"/>
+            </a:fillRef>
+            <a:effectRef idx="0">
               <a:schemeClr val="accent1"/>
             </a:effectRef>
             <a:fontRef idx="minor">
@@ -7442,15 +7536,16 @@
                 <a:srgbClr val="8FBFBF"/>
               </a:solidFill>
             </a:ln>
-          </p:spPr>
-          <p:style>
-            <a:lnRef idx="2">
-              <a:schemeClr val="accent1"/>
-            </a:lnRef>
-            <a:fillRef idx="0">
-              <a:schemeClr val="accent1"/>
-            </a:fillRef>
-            <a:effectRef idx="1">
+            <a:effectLst/>
+          </p:spPr>
+          <p:style>
+            <a:lnRef idx="2">
+              <a:schemeClr val="accent1"/>
+            </a:lnRef>
+            <a:fillRef idx="0">
+              <a:schemeClr val="accent1"/>
+            </a:fillRef>
+            <a:effectRef idx="0">
               <a:schemeClr val="accent1"/>
             </a:effectRef>
             <a:fontRef idx="minor">
@@ -7477,15 +7572,16 @@
                 <a:srgbClr val="8FBFBF"/>
               </a:solidFill>
             </a:ln>
-          </p:spPr>
-          <p:style>
-            <a:lnRef idx="2">
-              <a:schemeClr val="accent1"/>
-            </a:lnRef>
-            <a:fillRef idx="0">
-              <a:schemeClr val="accent1"/>
-            </a:fillRef>
-            <a:effectRef idx="1">
+            <a:effectLst/>
+          </p:spPr>
+          <p:style>
+            <a:lnRef idx="2">
+              <a:schemeClr val="accent1"/>
+            </a:lnRef>
+            <a:fillRef idx="0">
+              <a:schemeClr val="accent1"/>
+            </a:fillRef>
+            <a:effectRef idx="0">
               <a:schemeClr val="accent1"/>
             </a:effectRef>
             <a:fontRef idx="minor">
@@ -7512,15 +7608,16 @@
                 <a:srgbClr val="8FBFBF"/>
               </a:solidFill>
             </a:ln>
-          </p:spPr>
-          <p:style>
-            <a:lnRef idx="2">
-              <a:schemeClr val="accent1"/>
-            </a:lnRef>
-            <a:fillRef idx="0">
-              <a:schemeClr val="accent1"/>
-            </a:fillRef>
-            <a:effectRef idx="1">
+            <a:effectLst/>
+          </p:spPr>
+          <p:style>
+            <a:lnRef idx="2">
+              <a:schemeClr val="accent1"/>
+            </a:lnRef>
+            <a:fillRef idx="0">
+              <a:schemeClr val="accent1"/>
+            </a:fillRef>
+            <a:effectRef idx="0">
               <a:schemeClr val="accent1"/>
             </a:effectRef>
             <a:fontRef idx="minor">
@@ -7547,15 +7644,16 @@
                 <a:srgbClr val="8FBFBF"/>
               </a:solidFill>
             </a:ln>
-          </p:spPr>
-          <p:style>
-            <a:lnRef idx="2">
-              <a:schemeClr val="accent1"/>
-            </a:lnRef>
-            <a:fillRef idx="0">
-              <a:schemeClr val="accent1"/>
-            </a:fillRef>
-            <a:effectRef idx="1">
+            <a:effectLst/>
+          </p:spPr>
+          <p:style>
+            <a:lnRef idx="2">
+              <a:schemeClr val="accent1"/>
+            </a:lnRef>
+            <a:fillRef idx="0">
+              <a:schemeClr val="accent1"/>
+            </a:fillRef>
+            <a:effectRef idx="0">
               <a:schemeClr val="accent1"/>
             </a:effectRef>
             <a:fontRef idx="minor">
@@ -7582,15 +7680,16 @@
                 <a:srgbClr val="8FBFBF"/>
               </a:solidFill>
             </a:ln>
-          </p:spPr>
-          <p:style>
-            <a:lnRef idx="2">
-              <a:schemeClr val="accent1"/>
-            </a:lnRef>
-            <a:fillRef idx="0">
-              <a:schemeClr val="accent1"/>
-            </a:fillRef>
-            <a:effectRef idx="1">
+            <a:effectLst/>
+          </p:spPr>
+          <p:style>
+            <a:lnRef idx="2">
+              <a:schemeClr val="accent1"/>
+            </a:lnRef>
+            <a:fillRef idx="0">
+              <a:schemeClr val="accent1"/>
+            </a:fillRef>
+            <a:effectRef idx="0">
               <a:schemeClr val="accent1"/>
             </a:effectRef>
             <a:fontRef idx="minor">
@@ -7617,15 +7716,16 @@
                 <a:srgbClr val="8FBFBF"/>
               </a:solidFill>
             </a:ln>
-          </p:spPr>
-          <p:style>
-            <a:lnRef idx="2">
-              <a:schemeClr val="accent1"/>
-            </a:lnRef>
-            <a:fillRef idx="0">
-              <a:schemeClr val="accent1"/>
-            </a:fillRef>
-            <a:effectRef idx="1">
+            <a:effectLst/>
+          </p:spPr>
+          <p:style>
+            <a:lnRef idx="2">
+              <a:schemeClr val="accent1"/>
+            </a:lnRef>
+            <a:fillRef idx="0">
+              <a:schemeClr val="accent1"/>
+            </a:fillRef>
+            <a:effectRef idx="0">
               <a:schemeClr val="accent1"/>
             </a:effectRef>
             <a:fontRef idx="minor">
@@ -7677,7 +7777,7 @@
             <a:fillRef idx="3">
               <a:schemeClr val="accent1"/>
             </a:fillRef>
-            <a:effectRef idx="2">
+            <a:effectRef idx="0">
               <a:schemeClr val="accent1"/>
             </a:effectRef>
             <a:fontRef idx="minor">
@@ -7711,15 +7811,16 @@
                 <a:srgbClr val="8FBFBF"/>
               </a:solidFill>
             </a:ln>
-          </p:spPr>
-          <p:style>
-            <a:lnRef idx="2">
-              <a:schemeClr val="accent1"/>
-            </a:lnRef>
-            <a:fillRef idx="0">
-              <a:schemeClr val="accent1"/>
-            </a:fillRef>
-            <a:effectRef idx="1">
+            <a:effectLst/>
+          </p:spPr>
+          <p:style>
+            <a:lnRef idx="2">
+              <a:schemeClr val="accent1"/>
+            </a:lnRef>
+            <a:fillRef idx="0">
+              <a:schemeClr val="accent1"/>
+            </a:fillRef>
+            <a:effectRef idx="0">
               <a:schemeClr val="accent1"/>
             </a:effectRef>
             <a:fontRef idx="minor">
@@ -7746,15 +7847,16 @@
                 <a:srgbClr val="8FBFBF"/>
               </a:solidFill>
             </a:ln>
-          </p:spPr>
-          <p:style>
-            <a:lnRef idx="2">
-              <a:schemeClr val="accent1"/>
-            </a:lnRef>
-            <a:fillRef idx="0">
-              <a:schemeClr val="accent1"/>
-            </a:fillRef>
-            <a:effectRef idx="1">
+            <a:effectLst/>
+          </p:spPr>
+          <p:style>
+            <a:lnRef idx="2">
+              <a:schemeClr val="accent1"/>
+            </a:lnRef>
+            <a:fillRef idx="0">
+              <a:schemeClr val="accent1"/>
+            </a:fillRef>
+            <a:effectRef idx="0">
               <a:schemeClr val="accent1"/>
             </a:effectRef>
             <a:fontRef idx="minor">
@@ -7781,15 +7883,16 @@
                 <a:srgbClr val="8FBFBF"/>
               </a:solidFill>
             </a:ln>
-          </p:spPr>
-          <p:style>
-            <a:lnRef idx="2">
-              <a:schemeClr val="accent1"/>
-            </a:lnRef>
-            <a:fillRef idx="0">
-              <a:schemeClr val="accent1"/>
-            </a:fillRef>
-            <a:effectRef idx="1">
+            <a:effectLst/>
+          </p:spPr>
+          <p:style>
+            <a:lnRef idx="2">
+              <a:schemeClr val="accent1"/>
+            </a:lnRef>
+            <a:fillRef idx="0">
+              <a:schemeClr val="accent1"/>
+            </a:fillRef>
+            <a:effectRef idx="0">
               <a:schemeClr val="accent1"/>
             </a:effectRef>
             <a:fontRef idx="minor">
@@ -7816,15 +7919,16 @@
                 <a:srgbClr val="8FBFBF"/>
               </a:solidFill>
             </a:ln>
-          </p:spPr>
-          <p:style>
-            <a:lnRef idx="2">
-              <a:schemeClr val="accent1"/>
-            </a:lnRef>
-            <a:fillRef idx="0">
-              <a:schemeClr val="accent1"/>
-            </a:fillRef>
-            <a:effectRef idx="1">
+            <a:effectLst/>
+          </p:spPr>
+          <p:style>
+            <a:lnRef idx="2">
+              <a:schemeClr val="accent1"/>
+            </a:lnRef>
+            <a:fillRef idx="0">
+              <a:schemeClr val="accent1"/>
+            </a:fillRef>
+            <a:effectRef idx="0">
               <a:schemeClr val="accent1"/>
             </a:effectRef>
             <a:fontRef idx="minor">
@@ -7851,15 +7955,16 @@
                 <a:srgbClr val="8FBFBF"/>
               </a:solidFill>
             </a:ln>
-          </p:spPr>
-          <p:style>
-            <a:lnRef idx="2">
-              <a:schemeClr val="accent1"/>
-            </a:lnRef>
-            <a:fillRef idx="0">
-              <a:schemeClr val="accent1"/>
-            </a:fillRef>
-            <a:effectRef idx="1">
+            <a:effectLst/>
+          </p:spPr>
+          <p:style>
+            <a:lnRef idx="2">
+              <a:schemeClr val="accent1"/>
+            </a:lnRef>
+            <a:fillRef idx="0">
+              <a:schemeClr val="accent1"/>
+            </a:fillRef>
+            <a:effectRef idx="0">
               <a:schemeClr val="accent1"/>
             </a:effectRef>
             <a:fontRef idx="minor">
@@ -7886,15 +7991,16 @@
                 <a:srgbClr val="8FBFBF"/>
               </a:solidFill>
             </a:ln>
-          </p:spPr>
-          <p:style>
-            <a:lnRef idx="2">
-              <a:schemeClr val="accent1"/>
-            </a:lnRef>
-            <a:fillRef idx="0">
-              <a:schemeClr val="accent1"/>
-            </a:fillRef>
-            <a:effectRef idx="1">
+            <a:effectLst/>
+          </p:spPr>
+          <p:style>
+            <a:lnRef idx="2">
+              <a:schemeClr val="accent1"/>
+            </a:lnRef>
+            <a:fillRef idx="0">
+              <a:schemeClr val="accent1"/>
+            </a:fillRef>
+            <a:effectRef idx="0">
               <a:schemeClr val="accent1"/>
             </a:effectRef>
             <a:fontRef idx="minor">
@@ -7921,15 +8027,16 @@
                 <a:srgbClr val="8FBFBF"/>
               </a:solidFill>
             </a:ln>
-          </p:spPr>
-          <p:style>
-            <a:lnRef idx="2">
-              <a:schemeClr val="accent1"/>
-            </a:lnRef>
-            <a:fillRef idx="0">
-              <a:schemeClr val="accent1"/>
-            </a:fillRef>
-            <a:effectRef idx="1">
+            <a:effectLst/>
+          </p:spPr>
+          <p:style>
+            <a:lnRef idx="2">
+              <a:schemeClr val="accent1"/>
+            </a:lnRef>
+            <a:fillRef idx="0">
+              <a:schemeClr val="accent1"/>
+            </a:fillRef>
+            <a:effectRef idx="0">
               <a:schemeClr val="accent1"/>
             </a:effectRef>
             <a:fontRef idx="minor">
@@ -7956,15 +8063,16 @@
                 <a:srgbClr val="8FBFBF"/>
               </a:solidFill>
             </a:ln>
-          </p:spPr>
-          <p:style>
-            <a:lnRef idx="2">
-              <a:schemeClr val="accent1"/>
-            </a:lnRef>
-            <a:fillRef idx="0">
-              <a:schemeClr val="accent1"/>
-            </a:fillRef>
-            <a:effectRef idx="1">
+            <a:effectLst/>
+          </p:spPr>
+          <p:style>
+            <a:lnRef idx="2">
+              <a:schemeClr val="accent1"/>
+            </a:lnRef>
+            <a:fillRef idx="0">
+              <a:schemeClr val="accent1"/>
+            </a:fillRef>
+            <a:effectRef idx="0">
               <a:schemeClr val="accent1"/>
             </a:effectRef>
             <a:fontRef idx="minor">
@@ -7991,15 +8099,16 @@
                 <a:srgbClr val="8FBFBF"/>
               </a:solidFill>
             </a:ln>
-          </p:spPr>
-          <p:style>
-            <a:lnRef idx="2">
-              <a:schemeClr val="accent1"/>
-            </a:lnRef>
-            <a:fillRef idx="0">
-              <a:schemeClr val="accent1"/>
-            </a:fillRef>
-            <a:effectRef idx="1">
+            <a:effectLst/>
+          </p:spPr>
+          <p:style>
+            <a:lnRef idx="2">
+              <a:schemeClr val="accent1"/>
+            </a:lnRef>
+            <a:fillRef idx="0">
+              <a:schemeClr val="accent1"/>
+            </a:fillRef>
+            <a:effectRef idx="0">
               <a:schemeClr val="accent1"/>
             </a:effectRef>
             <a:fontRef idx="minor">
@@ -8026,15 +8135,16 @@
                 <a:srgbClr val="8FBFBF"/>
               </a:solidFill>
             </a:ln>
-          </p:spPr>
-          <p:style>
-            <a:lnRef idx="2">
-              <a:schemeClr val="accent1"/>
-            </a:lnRef>
-            <a:fillRef idx="0">
-              <a:schemeClr val="accent1"/>
-            </a:fillRef>
-            <a:effectRef idx="1">
+            <a:effectLst/>
+          </p:spPr>
+          <p:style>
+            <a:lnRef idx="2">
+              <a:schemeClr val="accent1"/>
+            </a:lnRef>
+            <a:fillRef idx="0">
+              <a:schemeClr val="accent1"/>
+            </a:fillRef>
+            <a:effectRef idx="0">
               <a:schemeClr val="accent1"/>
             </a:effectRef>
             <a:fontRef idx="minor">
@@ -8061,15 +8171,16 @@
                 <a:srgbClr val="8FBFBF"/>
               </a:solidFill>
             </a:ln>
-          </p:spPr>
-          <p:style>
-            <a:lnRef idx="2">
-              <a:schemeClr val="accent1"/>
-            </a:lnRef>
-            <a:fillRef idx="0">
-              <a:schemeClr val="accent1"/>
-            </a:fillRef>
-            <a:effectRef idx="1">
+            <a:effectLst/>
+          </p:spPr>
+          <p:style>
+            <a:lnRef idx="2">
+              <a:schemeClr val="accent1"/>
+            </a:lnRef>
+            <a:fillRef idx="0">
+              <a:schemeClr val="accent1"/>
+            </a:fillRef>
+            <a:effectRef idx="0">
               <a:schemeClr val="accent1"/>
             </a:effectRef>
             <a:fontRef idx="minor">
@@ -8121,7 +8232,7 @@
             <a:fillRef idx="3">
               <a:schemeClr val="accent1"/>
             </a:fillRef>
-            <a:effectRef idx="2">
+            <a:effectRef idx="0">
               <a:schemeClr val="accent1"/>
             </a:effectRef>
             <a:fontRef idx="minor">
@@ -8155,15 +8266,16 @@
                 <a:srgbClr val="8FBFBF"/>
               </a:solidFill>
             </a:ln>
-          </p:spPr>
-          <p:style>
-            <a:lnRef idx="2">
-              <a:schemeClr val="accent1"/>
-            </a:lnRef>
-            <a:fillRef idx="0">
-              <a:schemeClr val="accent1"/>
-            </a:fillRef>
-            <a:effectRef idx="1">
+            <a:effectLst/>
+          </p:spPr>
+          <p:style>
+            <a:lnRef idx="2">
+              <a:schemeClr val="accent1"/>
+            </a:lnRef>
+            <a:fillRef idx="0">
+              <a:schemeClr val="accent1"/>
+            </a:fillRef>
+            <a:effectRef idx="0">
               <a:schemeClr val="accent1"/>
             </a:effectRef>
             <a:fontRef idx="minor">
@@ -8190,15 +8302,16 @@
                 <a:srgbClr val="8FBFBF"/>
               </a:solidFill>
             </a:ln>
-          </p:spPr>
-          <p:style>
-            <a:lnRef idx="2">
-              <a:schemeClr val="accent1"/>
-            </a:lnRef>
-            <a:fillRef idx="0">
-              <a:schemeClr val="accent1"/>
-            </a:fillRef>
-            <a:effectRef idx="1">
+            <a:effectLst/>
+          </p:spPr>
+          <p:style>
+            <a:lnRef idx="2">
+              <a:schemeClr val="accent1"/>
+            </a:lnRef>
+            <a:fillRef idx="0">
+              <a:schemeClr val="accent1"/>
+            </a:fillRef>
+            <a:effectRef idx="0">
               <a:schemeClr val="accent1"/>
             </a:effectRef>
             <a:fontRef idx="minor">
@@ -8225,15 +8338,16 @@
                 <a:srgbClr val="8FBFBF"/>
               </a:solidFill>
             </a:ln>
-          </p:spPr>
-          <p:style>
-            <a:lnRef idx="2">
-              <a:schemeClr val="accent1"/>
-            </a:lnRef>
-            <a:fillRef idx="0">
-              <a:schemeClr val="accent1"/>
-            </a:fillRef>
-            <a:effectRef idx="1">
+            <a:effectLst/>
+          </p:spPr>
+          <p:style>
+            <a:lnRef idx="2">
+              <a:schemeClr val="accent1"/>
+            </a:lnRef>
+            <a:fillRef idx="0">
+              <a:schemeClr val="accent1"/>
+            </a:fillRef>
+            <a:effectRef idx="0">
               <a:schemeClr val="accent1"/>
             </a:effectRef>
             <a:fontRef idx="minor">
@@ -8260,15 +8374,16 @@
                 <a:srgbClr val="8FBFBF"/>
               </a:solidFill>
             </a:ln>
-          </p:spPr>
-          <p:style>
-            <a:lnRef idx="2">
-              <a:schemeClr val="accent1"/>
-            </a:lnRef>
-            <a:fillRef idx="0">
-              <a:schemeClr val="accent1"/>
-            </a:fillRef>
-            <a:effectRef idx="1">
+            <a:effectLst/>
+          </p:spPr>
+          <p:style>
+            <a:lnRef idx="2">
+              <a:schemeClr val="accent1"/>
+            </a:lnRef>
+            <a:fillRef idx="0">
+              <a:schemeClr val="accent1"/>
+            </a:fillRef>
+            <a:effectRef idx="0">
               <a:schemeClr val="accent1"/>
             </a:effectRef>
             <a:fontRef idx="minor">
@@ -8295,15 +8410,16 @@
                 <a:srgbClr val="8FBFBF"/>
               </a:solidFill>
             </a:ln>
-          </p:spPr>
-          <p:style>
-            <a:lnRef idx="2">
-              <a:schemeClr val="accent1"/>
-            </a:lnRef>
-            <a:fillRef idx="0">
-              <a:schemeClr val="accent1"/>
-            </a:fillRef>
-            <a:effectRef idx="1">
+            <a:effectLst/>
+          </p:spPr>
+          <p:style>
+            <a:lnRef idx="2">
+              <a:schemeClr val="accent1"/>
+            </a:lnRef>
+            <a:fillRef idx="0">
+              <a:schemeClr val="accent1"/>
+            </a:fillRef>
+            <a:effectRef idx="0">
               <a:schemeClr val="accent1"/>
             </a:effectRef>
             <a:fontRef idx="minor">
@@ -8330,15 +8446,16 @@
                 <a:srgbClr val="8FBFBF"/>
               </a:solidFill>
             </a:ln>
-          </p:spPr>
-          <p:style>
-            <a:lnRef idx="2">
-              <a:schemeClr val="accent1"/>
-            </a:lnRef>
-            <a:fillRef idx="0">
-              <a:schemeClr val="accent1"/>
-            </a:fillRef>
-            <a:effectRef idx="1">
+            <a:effectLst/>
+          </p:spPr>
+          <p:style>
+            <a:lnRef idx="2">
+              <a:schemeClr val="accent1"/>
+            </a:lnRef>
+            <a:fillRef idx="0">
+              <a:schemeClr val="accent1"/>
+            </a:fillRef>
+            <a:effectRef idx="0">
               <a:schemeClr val="accent1"/>
             </a:effectRef>
             <a:fontRef idx="minor">
@@ -8365,15 +8482,16 @@
                 <a:srgbClr val="8FBFBF"/>
               </a:solidFill>
             </a:ln>
-          </p:spPr>
-          <p:style>
-            <a:lnRef idx="2">
-              <a:schemeClr val="accent1"/>
-            </a:lnRef>
-            <a:fillRef idx="0">
-              <a:schemeClr val="accent1"/>
-            </a:fillRef>
-            <a:effectRef idx="1">
+            <a:effectLst/>
+          </p:spPr>
+          <p:style>
+            <a:lnRef idx="2">
+              <a:schemeClr val="accent1"/>
+            </a:lnRef>
+            <a:fillRef idx="0">
+              <a:schemeClr val="accent1"/>
+            </a:fillRef>
+            <a:effectRef idx="0">
               <a:schemeClr val="accent1"/>
             </a:effectRef>
             <a:fontRef idx="minor">
@@ -8400,15 +8518,16 @@
                 <a:srgbClr val="8FBFBF"/>
               </a:solidFill>
             </a:ln>
-          </p:spPr>
-          <p:style>
-            <a:lnRef idx="2">
-              <a:schemeClr val="accent1"/>
-            </a:lnRef>
-            <a:fillRef idx="0">
-              <a:schemeClr val="accent1"/>
-            </a:fillRef>
-            <a:effectRef idx="1">
+            <a:effectLst/>
+          </p:spPr>
+          <p:style>
+            <a:lnRef idx="2">
+              <a:schemeClr val="accent1"/>
+            </a:lnRef>
+            <a:fillRef idx="0">
+              <a:schemeClr val="accent1"/>
+            </a:fillRef>
+            <a:effectRef idx="0">
               <a:schemeClr val="accent1"/>
             </a:effectRef>
             <a:fontRef idx="minor">
@@ -8435,15 +8554,16 @@
                 <a:srgbClr val="8FBFBF"/>
               </a:solidFill>
             </a:ln>
-          </p:spPr>
-          <p:style>
-            <a:lnRef idx="2">
-              <a:schemeClr val="accent1"/>
-            </a:lnRef>
-            <a:fillRef idx="0">
-              <a:schemeClr val="accent1"/>
-            </a:fillRef>
-            <a:effectRef idx="1">
+            <a:effectLst/>
+          </p:spPr>
+          <p:style>
+            <a:lnRef idx="2">
+              <a:schemeClr val="accent1"/>
+            </a:lnRef>
+            <a:fillRef idx="0">
+              <a:schemeClr val="accent1"/>
+            </a:fillRef>
+            <a:effectRef idx="0">
               <a:schemeClr val="accent1"/>
             </a:effectRef>
             <a:fontRef idx="minor">
@@ -8470,15 +8590,16 @@
                 <a:srgbClr val="8FBFBF"/>
               </a:solidFill>
             </a:ln>
-          </p:spPr>
-          <p:style>
-            <a:lnRef idx="2">
-              <a:schemeClr val="accent1"/>
-            </a:lnRef>
-            <a:fillRef idx="0">
-              <a:schemeClr val="accent1"/>
-            </a:fillRef>
-            <a:effectRef idx="1">
+            <a:effectLst/>
+          </p:spPr>
+          <p:style>
+            <a:lnRef idx="2">
+              <a:schemeClr val="accent1"/>
+            </a:lnRef>
+            <a:fillRef idx="0">
+              <a:schemeClr val="accent1"/>
+            </a:fillRef>
+            <a:effectRef idx="0">
               <a:schemeClr val="accent1"/>
             </a:effectRef>
             <a:fontRef idx="minor">
@@ -8505,15 +8626,16 @@
                 <a:srgbClr val="8FBFBF"/>
               </a:solidFill>
             </a:ln>
-          </p:spPr>
-          <p:style>
-            <a:lnRef idx="2">
-              <a:schemeClr val="accent1"/>
-            </a:lnRef>
-            <a:fillRef idx="0">
-              <a:schemeClr val="accent1"/>
-            </a:fillRef>
-            <a:effectRef idx="1">
+            <a:effectLst/>
+          </p:spPr>
+          <p:style>
+            <a:lnRef idx="2">
+              <a:schemeClr val="accent1"/>
+            </a:lnRef>
+            <a:fillRef idx="0">
+              <a:schemeClr val="accent1"/>
+            </a:fillRef>
+            <a:effectRef idx="0">
               <a:schemeClr val="accent1"/>
             </a:effectRef>
             <a:fontRef idx="minor">
@@ -8565,7 +8687,7 @@
             <a:fillRef idx="3">
               <a:schemeClr val="accent1"/>
             </a:fillRef>
-            <a:effectRef idx="2">
+            <a:effectRef idx="0">
               <a:schemeClr val="accent1"/>
             </a:effectRef>
             <a:fontRef idx="minor">
@@ -8599,15 +8721,16 @@
                 <a:srgbClr val="8FBFBF"/>
               </a:solidFill>
             </a:ln>
-          </p:spPr>
-          <p:style>
-            <a:lnRef idx="2">
-              <a:schemeClr val="accent1"/>
-            </a:lnRef>
-            <a:fillRef idx="0">
-              <a:schemeClr val="accent1"/>
-            </a:fillRef>
-            <a:effectRef idx="1">
+            <a:effectLst/>
+          </p:spPr>
+          <p:style>
+            <a:lnRef idx="2">
+              <a:schemeClr val="accent1"/>
+            </a:lnRef>
+            <a:fillRef idx="0">
+              <a:schemeClr val="accent1"/>
+            </a:fillRef>
+            <a:effectRef idx="0">
               <a:schemeClr val="accent1"/>
             </a:effectRef>
             <a:fontRef idx="minor">
@@ -8634,15 +8757,16 @@
                 <a:srgbClr val="8FBFBF"/>
               </a:solidFill>
             </a:ln>
-          </p:spPr>
-          <p:style>
-            <a:lnRef idx="2">
-              <a:schemeClr val="accent1"/>
-            </a:lnRef>
-            <a:fillRef idx="0">
-              <a:schemeClr val="accent1"/>
-            </a:fillRef>
-            <a:effectRef idx="1">
+            <a:effectLst/>
+          </p:spPr>
+          <p:style>
+            <a:lnRef idx="2">
+              <a:schemeClr val="accent1"/>
+            </a:lnRef>
+            <a:fillRef idx="0">
+              <a:schemeClr val="accent1"/>
+            </a:fillRef>
+            <a:effectRef idx="0">
               <a:schemeClr val="accent1"/>
             </a:effectRef>
             <a:fontRef idx="minor">
@@ -8669,15 +8793,16 @@
                 <a:srgbClr val="8FBFBF"/>
               </a:solidFill>
             </a:ln>
-          </p:spPr>
-          <p:style>
-            <a:lnRef idx="2">
-              <a:schemeClr val="accent1"/>
-            </a:lnRef>
-            <a:fillRef idx="0">
-              <a:schemeClr val="accent1"/>
-            </a:fillRef>
-            <a:effectRef idx="1">
+            <a:effectLst/>
+          </p:spPr>
+          <p:style>
+            <a:lnRef idx="2">
+              <a:schemeClr val="accent1"/>
+            </a:lnRef>
+            <a:fillRef idx="0">
+              <a:schemeClr val="accent1"/>
+            </a:fillRef>
+            <a:effectRef idx="0">
               <a:schemeClr val="accent1"/>
             </a:effectRef>
             <a:fontRef idx="minor">
@@ -8704,15 +8829,16 @@
                 <a:srgbClr val="8FBFBF"/>
               </a:solidFill>
             </a:ln>
-          </p:spPr>
-          <p:style>
-            <a:lnRef idx="2">
-              <a:schemeClr val="accent1"/>
-            </a:lnRef>
-            <a:fillRef idx="0">
-              <a:schemeClr val="accent1"/>
-            </a:fillRef>
-            <a:effectRef idx="1">
+            <a:effectLst/>
+          </p:spPr>
+          <p:style>
+            <a:lnRef idx="2">
+              <a:schemeClr val="accent1"/>
+            </a:lnRef>
+            <a:fillRef idx="0">
+              <a:schemeClr val="accent1"/>
+            </a:fillRef>
+            <a:effectRef idx="0">
               <a:schemeClr val="accent1"/>
             </a:effectRef>
             <a:fontRef idx="minor">
@@ -8739,15 +8865,16 @@
                 <a:srgbClr val="8FBFBF"/>
               </a:solidFill>
             </a:ln>
-          </p:spPr>
-          <p:style>
-            <a:lnRef idx="2">
-              <a:schemeClr val="accent1"/>
-            </a:lnRef>
-            <a:fillRef idx="0">
-              <a:schemeClr val="accent1"/>
-            </a:fillRef>
-            <a:effectRef idx="1">
+            <a:effectLst/>
+          </p:spPr>
+          <p:style>
+            <a:lnRef idx="2">
+              <a:schemeClr val="accent1"/>
+            </a:lnRef>
+            <a:fillRef idx="0">
+              <a:schemeClr val="accent1"/>
+            </a:fillRef>
+            <a:effectRef idx="0">
               <a:schemeClr val="accent1"/>
             </a:effectRef>
             <a:fontRef idx="minor">
@@ -8774,15 +8901,16 @@
                 <a:srgbClr val="8FBFBF"/>
               </a:solidFill>
             </a:ln>
-          </p:spPr>
-          <p:style>
-            <a:lnRef idx="2">
-              <a:schemeClr val="accent1"/>
-            </a:lnRef>
-            <a:fillRef idx="0">
-              <a:schemeClr val="accent1"/>
-            </a:fillRef>
-            <a:effectRef idx="1">
+            <a:effectLst/>
+          </p:spPr>
+          <p:style>
+            <a:lnRef idx="2">
+              <a:schemeClr val="accent1"/>
+            </a:lnRef>
+            <a:fillRef idx="0">
+              <a:schemeClr val="accent1"/>
+            </a:fillRef>
+            <a:effectRef idx="0">
               <a:schemeClr val="accent1"/>
             </a:effectRef>
             <a:fontRef idx="minor">
@@ -8809,15 +8937,16 @@
                 <a:srgbClr val="8FBFBF"/>
               </a:solidFill>
             </a:ln>
-          </p:spPr>
-          <p:style>
-            <a:lnRef idx="2">
-              <a:schemeClr val="accent1"/>
-            </a:lnRef>
-            <a:fillRef idx="0">
-              <a:schemeClr val="accent1"/>
-            </a:fillRef>
-            <a:effectRef idx="1">
+            <a:effectLst/>
+          </p:spPr>
+          <p:style>
+            <a:lnRef idx="2">
+              <a:schemeClr val="accent1"/>
+            </a:lnRef>
+            <a:fillRef idx="0">
+              <a:schemeClr val="accent1"/>
+            </a:fillRef>
+            <a:effectRef idx="0">
               <a:schemeClr val="accent1"/>
             </a:effectRef>
             <a:fontRef idx="minor">
@@ -8844,15 +8973,16 @@
                 <a:srgbClr val="8FBFBF"/>
               </a:solidFill>
             </a:ln>
-          </p:spPr>
-          <p:style>
-            <a:lnRef idx="2">
-              <a:schemeClr val="accent1"/>
-            </a:lnRef>
-            <a:fillRef idx="0">
-              <a:schemeClr val="accent1"/>
-            </a:fillRef>
-            <a:effectRef idx="1">
+            <a:effectLst/>
+          </p:spPr>
+          <p:style>
+            <a:lnRef idx="2">
+              <a:schemeClr val="accent1"/>
+            </a:lnRef>
+            <a:fillRef idx="0">
+              <a:schemeClr val="accent1"/>
+            </a:fillRef>
+            <a:effectRef idx="0">
               <a:schemeClr val="accent1"/>
             </a:effectRef>
             <a:fontRef idx="minor">
@@ -8879,15 +9009,16 @@
                 <a:srgbClr val="8FBFBF"/>
               </a:solidFill>
             </a:ln>
-          </p:spPr>
-          <p:style>
-            <a:lnRef idx="2">
-              <a:schemeClr val="accent1"/>
-            </a:lnRef>
-            <a:fillRef idx="0">
-              <a:schemeClr val="accent1"/>
-            </a:fillRef>
-            <a:effectRef idx="1">
+            <a:effectLst/>
+          </p:spPr>
+          <p:style>
+            <a:lnRef idx="2">
+              <a:schemeClr val="accent1"/>
+            </a:lnRef>
+            <a:fillRef idx="0">
+              <a:schemeClr val="accent1"/>
+            </a:fillRef>
+            <a:effectRef idx="0">
               <a:schemeClr val="accent1"/>
             </a:effectRef>
             <a:fontRef idx="minor">
@@ -8914,15 +9045,16 @@
                 <a:srgbClr val="8FBFBF"/>
               </a:solidFill>
             </a:ln>
-          </p:spPr>
-          <p:style>
-            <a:lnRef idx="2">
-              <a:schemeClr val="accent1"/>
-            </a:lnRef>
-            <a:fillRef idx="0">
-              <a:schemeClr val="accent1"/>
-            </a:fillRef>
-            <a:effectRef idx="1">
+            <a:effectLst/>
+          </p:spPr>
+          <p:style>
+            <a:lnRef idx="2">
+              <a:schemeClr val="accent1"/>
+            </a:lnRef>
+            <a:fillRef idx="0">
+              <a:schemeClr val="accent1"/>
+            </a:fillRef>
+            <a:effectRef idx="0">
               <a:schemeClr val="accent1"/>
             </a:effectRef>
             <a:fontRef idx="minor">
@@ -8949,15 +9081,16 @@
                 <a:srgbClr val="8FBFBF"/>
               </a:solidFill>
             </a:ln>
-          </p:spPr>
-          <p:style>
-            <a:lnRef idx="2">
-              <a:schemeClr val="accent1"/>
-            </a:lnRef>
-            <a:fillRef idx="0">
-              <a:schemeClr val="accent1"/>
-            </a:fillRef>
-            <a:effectRef idx="1">
+            <a:effectLst/>
+          </p:spPr>
+          <p:style>
+            <a:lnRef idx="2">
+              <a:schemeClr val="accent1"/>
+            </a:lnRef>
+            <a:fillRef idx="0">
+              <a:schemeClr val="accent1"/>
+            </a:fillRef>
+            <a:effectRef idx="0">
               <a:schemeClr val="accent1"/>
             </a:effectRef>
             <a:fontRef idx="minor">

--- a/gakkyu/tegami/pptx/Y1.pptx
+++ b/gakkyu/tegami/pptx/Y1.pptx
@@ -3568,44 +3568,9 @@
           </a:p>
         </p:txBody>
       </p:sp>
-      <p:sp>
-        <p:nvSpPr>
-          <p:cNvPr id="3" name="名前欄"/>
-          <p:cNvSpPr txBox="1"/>
-          <p:nvPr/>
-        </p:nvSpPr>
-        <p:spPr>
-          <a:xfrm>
-            <a:off x="3600000" y="475200"/>
-            <a:ext cx="3420000" cy="252000"/>
-          </a:xfrm>
-          <a:prstGeom prst="rect">
-            <a:avLst/>
-          </a:prstGeom>
-          <a:noFill/>
-        </p:spPr>
-        <p:txBody>
-          <a:bodyPr wrap="square" lIns="0" rIns="0" tIns="0" bIns="0" anchor="t">
-            <a:spAutoFit/>
-          </a:bodyPr>
-          <a:lstStyle/>
-          <a:p>
-            <a:pPr algn="r"/>
-            <a:r>
-              <a:rPr sz="1000" b="0">
-                <a:solidFill>
-                  <a:srgbClr val="38424B"/>
-                </a:solidFill>
-                <a:latin typeface="UD デジタル 教科書体 N-R"/>
-              </a:rPr>
-              <a:t>（　　年　　組　　名前　　　　　　　　）</a:t>
-            </a:r>
-          </a:p>
-        </p:txBody>
-      </p:sp>
       <p:cxnSp>
         <p:nvCxnSpPr>
-          <p:cNvPr id="4" name="見出しの線"/>
+          <p:cNvPr id="3" name="見出しの線"/>
           <p:cNvCxnSpPr/>
           <p:nvPr/>
         </p:nvCxnSpPr>
@@ -3641,7 +3606,7 @@
       </p:cxnSp>
       <p:grpSp>
         <p:nvGrpSpPr>
-          <p:cNvPr id="5" name="1行目"/>
+          <p:cNvPr id="4" name="1行目"/>
           <p:cNvGrpSpPr/>
           <p:nvPr/>
         </p:nvGrpSpPr>
@@ -3655,7 +3620,7 @@
         </p:grpSpPr>
         <p:sp>
           <p:nvSpPr>
-            <p:cNvPr id="6" name="外わく"/>
+            <p:cNvPr id="5" name="外わく"/>
             <p:cNvSpPr/>
             <p:nvPr/>
           </p:nvSpPr>
@@ -3699,7 +3664,7 @@
         </p:sp>
         <p:cxnSp>
           <p:nvCxnSpPr>
-            <p:cNvPr id="7" name="マスの線 1"/>
+            <p:cNvPr id="6" name="マスの線 1"/>
             <p:cNvCxnSpPr/>
             <p:nvPr/>
           </p:nvCxnSpPr>
@@ -3735,7 +3700,7 @@
         </p:cxnSp>
         <p:cxnSp>
           <p:nvCxnSpPr>
-            <p:cNvPr id="8" name="マスの線 2"/>
+            <p:cNvPr id="7" name="マスの線 2"/>
             <p:cNvCxnSpPr/>
             <p:nvPr/>
           </p:nvCxnSpPr>
@@ -3771,7 +3736,7 @@
         </p:cxnSp>
         <p:cxnSp>
           <p:nvCxnSpPr>
-            <p:cNvPr id="9" name="マスの線 3"/>
+            <p:cNvPr id="8" name="マスの線 3"/>
             <p:cNvCxnSpPr/>
             <p:nvPr/>
           </p:nvCxnSpPr>
@@ -3807,7 +3772,7 @@
         </p:cxnSp>
         <p:cxnSp>
           <p:nvCxnSpPr>
-            <p:cNvPr id="10" name="マスの線 4"/>
+            <p:cNvPr id="9" name="マスの線 4"/>
             <p:cNvCxnSpPr/>
             <p:nvPr/>
           </p:nvCxnSpPr>
@@ -3843,7 +3808,7 @@
         </p:cxnSp>
         <p:cxnSp>
           <p:nvCxnSpPr>
-            <p:cNvPr id="11" name="マスの線 5"/>
+            <p:cNvPr id="10" name="マスの線 5"/>
             <p:cNvCxnSpPr/>
             <p:nvPr/>
           </p:nvCxnSpPr>
@@ -3879,7 +3844,7 @@
         </p:cxnSp>
         <p:cxnSp>
           <p:nvCxnSpPr>
-            <p:cNvPr id="12" name="マスの線 6"/>
+            <p:cNvPr id="11" name="マスの線 6"/>
             <p:cNvCxnSpPr/>
             <p:nvPr/>
           </p:nvCxnSpPr>
@@ -3915,7 +3880,7 @@
         </p:cxnSp>
         <p:cxnSp>
           <p:nvCxnSpPr>
-            <p:cNvPr id="13" name="マスの線 7"/>
+            <p:cNvPr id="12" name="マスの線 7"/>
             <p:cNvCxnSpPr/>
             <p:nvPr/>
           </p:nvCxnSpPr>
@@ -3951,7 +3916,7 @@
         </p:cxnSp>
         <p:cxnSp>
           <p:nvCxnSpPr>
-            <p:cNvPr id="14" name="マスの線 8"/>
+            <p:cNvPr id="13" name="マスの線 8"/>
             <p:cNvCxnSpPr/>
             <p:nvPr/>
           </p:nvCxnSpPr>
@@ -3987,7 +3952,7 @@
         </p:cxnSp>
         <p:cxnSp>
           <p:nvCxnSpPr>
-            <p:cNvPr id="15" name="マスの線 9"/>
+            <p:cNvPr id="14" name="マスの線 9"/>
             <p:cNvCxnSpPr/>
             <p:nvPr/>
           </p:nvCxnSpPr>
@@ -4023,7 +3988,7 @@
         </p:cxnSp>
         <p:cxnSp>
           <p:nvCxnSpPr>
-            <p:cNvPr id="16" name="マスの線 10"/>
+            <p:cNvPr id="15" name="マスの線 10"/>
             <p:cNvCxnSpPr/>
             <p:nvPr/>
           </p:nvCxnSpPr>
@@ -4059,7 +4024,7 @@
         </p:cxnSp>
         <p:cxnSp>
           <p:nvCxnSpPr>
-            <p:cNvPr id="17" name="マスの線 11"/>
+            <p:cNvPr id="16" name="マスの線 11"/>
             <p:cNvCxnSpPr/>
             <p:nvPr/>
           </p:nvCxnSpPr>
@@ -4096,7 +4061,7 @@
       </p:grpSp>
       <p:grpSp>
         <p:nvGrpSpPr>
-          <p:cNvPr id="18" name="2行目"/>
+          <p:cNvPr id="17" name="2行目"/>
           <p:cNvGrpSpPr/>
           <p:nvPr/>
         </p:nvGrpSpPr>
@@ -4110,7 +4075,7 @@
         </p:grpSpPr>
         <p:sp>
           <p:nvSpPr>
-            <p:cNvPr id="19" name="外わく"/>
+            <p:cNvPr id="18" name="外わく"/>
             <p:cNvSpPr/>
             <p:nvPr/>
           </p:nvSpPr>
@@ -4154,7 +4119,7 @@
         </p:sp>
         <p:cxnSp>
           <p:nvCxnSpPr>
-            <p:cNvPr id="20" name="マスの線 1"/>
+            <p:cNvPr id="19" name="マスの線 1"/>
             <p:cNvCxnSpPr/>
             <p:nvPr/>
           </p:nvCxnSpPr>
@@ -4190,7 +4155,7 @@
         </p:cxnSp>
         <p:cxnSp>
           <p:nvCxnSpPr>
-            <p:cNvPr id="21" name="マスの線 2"/>
+            <p:cNvPr id="20" name="マスの線 2"/>
             <p:cNvCxnSpPr/>
             <p:nvPr/>
           </p:nvCxnSpPr>
@@ -4226,7 +4191,7 @@
         </p:cxnSp>
         <p:cxnSp>
           <p:nvCxnSpPr>
-            <p:cNvPr id="22" name="マスの線 3"/>
+            <p:cNvPr id="21" name="マスの線 3"/>
             <p:cNvCxnSpPr/>
             <p:nvPr/>
           </p:nvCxnSpPr>
@@ -4262,7 +4227,7 @@
         </p:cxnSp>
         <p:cxnSp>
           <p:nvCxnSpPr>
-            <p:cNvPr id="23" name="マスの線 4"/>
+            <p:cNvPr id="22" name="マスの線 4"/>
             <p:cNvCxnSpPr/>
             <p:nvPr/>
           </p:nvCxnSpPr>
@@ -4298,7 +4263,7 @@
         </p:cxnSp>
         <p:cxnSp>
           <p:nvCxnSpPr>
-            <p:cNvPr id="24" name="マスの線 5"/>
+            <p:cNvPr id="23" name="マスの線 5"/>
             <p:cNvCxnSpPr/>
             <p:nvPr/>
           </p:nvCxnSpPr>
@@ -4334,7 +4299,7 @@
         </p:cxnSp>
         <p:cxnSp>
           <p:nvCxnSpPr>
-            <p:cNvPr id="25" name="マスの線 6"/>
+            <p:cNvPr id="24" name="マスの線 6"/>
             <p:cNvCxnSpPr/>
             <p:nvPr/>
           </p:nvCxnSpPr>
@@ -4370,7 +4335,7 @@
         </p:cxnSp>
         <p:cxnSp>
           <p:nvCxnSpPr>
-            <p:cNvPr id="26" name="マスの線 7"/>
+            <p:cNvPr id="25" name="マスの線 7"/>
             <p:cNvCxnSpPr/>
             <p:nvPr/>
           </p:nvCxnSpPr>
@@ -4406,7 +4371,7 @@
         </p:cxnSp>
         <p:cxnSp>
           <p:nvCxnSpPr>
-            <p:cNvPr id="27" name="マスの線 8"/>
+            <p:cNvPr id="26" name="マスの線 8"/>
             <p:cNvCxnSpPr/>
             <p:nvPr/>
           </p:nvCxnSpPr>
@@ -4442,7 +4407,7 @@
         </p:cxnSp>
         <p:cxnSp>
           <p:nvCxnSpPr>
-            <p:cNvPr id="28" name="マスの線 9"/>
+            <p:cNvPr id="27" name="マスの線 9"/>
             <p:cNvCxnSpPr/>
             <p:nvPr/>
           </p:nvCxnSpPr>
@@ -4478,7 +4443,7 @@
         </p:cxnSp>
         <p:cxnSp>
           <p:nvCxnSpPr>
-            <p:cNvPr id="29" name="マスの線 10"/>
+            <p:cNvPr id="28" name="マスの線 10"/>
             <p:cNvCxnSpPr/>
             <p:nvPr/>
           </p:nvCxnSpPr>
@@ -4514,7 +4479,7 @@
         </p:cxnSp>
         <p:cxnSp>
           <p:nvCxnSpPr>
-            <p:cNvPr id="30" name="マスの線 11"/>
+            <p:cNvPr id="29" name="マスの線 11"/>
             <p:cNvCxnSpPr/>
             <p:nvPr/>
           </p:nvCxnSpPr>
@@ -4551,7 +4516,7 @@
       </p:grpSp>
       <p:grpSp>
         <p:nvGrpSpPr>
-          <p:cNvPr id="31" name="3行目"/>
+          <p:cNvPr id="30" name="3行目"/>
           <p:cNvGrpSpPr/>
           <p:nvPr/>
         </p:nvGrpSpPr>
@@ -4565,7 +4530,7 @@
         </p:grpSpPr>
         <p:sp>
           <p:nvSpPr>
-            <p:cNvPr id="32" name="外わく"/>
+            <p:cNvPr id="31" name="外わく"/>
             <p:cNvSpPr/>
             <p:nvPr/>
           </p:nvSpPr>
@@ -4609,7 +4574,7 @@
         </p:sp>
         <p:cxnSp>
           <p:nvCxnSpPr>
-            <p:cNvPr id="33" name="マスの線 1"/>
+            <p:cNvPr id="32" name="マスの線 1"/>
             <p:cNvCxnSpPr/>
             <p:nvPr/>
           </p:nvCxnSpPr>
@@ -4645,7 +4610,7 @@
         </p:cxnSp>
         <p:cxnSp>
           <p:nvCxnSpPr>
-            <p:cNvPr id="34" name="マスの線 2"/>
+            <p:cNvPr id="33" name="マスの線 2"/>
             <p:cNvCxnSpPr/>
             <p:nvPr/>
           </p:nvCxnSpPr>
@@ -4681,7 +4646,7 @@
         </p:cxnSp>
         <p:cxnSp>
           <p:nvCxnSpPr>
-            <p:cNvPr id="35" name="マスの線 3"/>
+            <p:cNvPr id="34" name="マスの線 3"/>
             <p:cNvCxnSpPr/>
             <p:nvPr/>
           </p:nvCxnSpPr>
@@ -4717,7 +4682,7 @@
         </p:cxnSp>
         <p:cxnSp>
           <p:nvCxnSpPr>
-            <p:cNvPr id="36" name="マスの線 4"/>
+            <p:cNvPr id="35" name="マスの線 4"/>
             <p:cNvCxnSpPr/>
             <p:nvPr/>
           </p:nvCxnSpPr>
@@ -4753,7 +4718,7 @@
         </p:cxnSp>
         <p:cxnSp>
           <p:nvCxnSpPr>
-            <p:cNvPr id="37" name="マスの線 5"/>
+            <p:cNvPr id="36" name="マスの線 5"/>
             <p:cNvCxnSpPr/>
             <p:nvPr/>
           </p:nvCxnSpPr>
@@ -4789,7 +4754,7 @@
         </p:cxnSp>
         <p:cxnSp>
           <p:nvCxnSpPr>
-            <p:cNvPr id="38" name="マスの線 6"/>
+            <p:cNvPr id="37" name="マスの線 6"/>
             <p:cNvCxnSpPr/>
             <p:nvPr/>
           </p:nvCxnSpPr>
@@ -4825,7 +4790,7 @@
         </p:cxnSp>
         <p:cxnSp>
           <p:nvCxnSpPr>
-            <p:cNvPr id="39" name="マスの線 7"/>
+            <p:cNvPr id="38" name="マスの線 7"/>
             <p:cNvCxnSpPr/>
             <p:nvPr/>
           </p:nvCxnSpPr>
@@ -4861,7 +4826,7 @@
         </p:cxnSp>
         <p:cxnSp>
           <p:nvCxnSpPr>
-            <p:cNvPr id="40" name="マスの線 8"/>
+            <p:cNvPr id="39" name="マスの線 8"/>
             <p:cNvCxnSpPr/>
             <p:nvPr/>
           </p:nvCxnSpPr>
@@ -4897,7 +4862,7 @@
         </p:cxnSp>
         <p:cxnSp>
           <p:nvCxnSpPr>
-            <p:cNvPr id="41" name="マスの線 9"/>
+            <p:cNvPr id="40" name="マスの線 9"/>
             <p:cNvCxnSpPr/>
             <p:nvPr/>
           </p:nvCxnSpPr>
@@ -4933,7 +4898,7 @@
         </p:cxnSp>
         <p:cxnSp>
           <p:nvCxnSpPr>
-            <p:cNvPr id="42" name="マスの線 10"/>
+            <p:cNvPr id="41" name="マスの線 10"/>
             <p:cNvCxnSpPr/>
             <p:nvPr/>
           </p:nvCxnSpPr>
@@ -4969,7 +4934,7 @@
         </p:cxnSp>
         <p:cxnSp>
           <p:nvCxnSpPr>
-            <p:cNvPr id="43" name="マスの線 11"/>
+            <p:cNvPr id="42" name="マスの線 11"/>
             <p:cNvCxnSpPr/>
             <p:nvPr/>
           </p:nvCxnSpPr>
@@ -5006,7 +4971,7 @@
       </p:grpSp>
       <p:grpSp>
         <p:nvGrpSpPr>
-          <p:cNvPr id="44" name="4行目"/>
+          <p:cNvPr id="43" name="4行目"/>
           <p:cNvGrpSpPr/>
           <p:nvPr/>
         </p:nvGrpSpPr>
@@ -5020,7 +4985,7 @@
         </p:grpSpPr>
         <p:sp>
           <p:nvSpPr>
-            <p:cNvPr id="45" name="外わく"/>
+            <p:cNvPr id="44" name="外わく"/>
             <p:cNvSpPr/>
             <p:nvPr/>
           </p:nvSpPr>
@@ -5064,7 +5029,7 @@
         </p:sp>
         <p:cxnSp>
           <p:nvCxnSpPr>
-            <p:cNvPr id="46" name="マスの線 1"/>
+            <p:cNvPr id="45" name="マスの線 1"/>
             <p:cNvCxnSpPr/>
             <p:nvPr/>
           </p:nvCxnSpPr>
@@ -5100,7 +5065,7 @@
         </p:cxnSp>
         <p:cxnSp>
           <p:nvCxnSpPr>
-            <p:cNvPr id="47" name="マスの線 2"/>
+            <p:cNvPr id="46" name="マスの線 2"/>
             <p:cNvCxnSpPr/>
             <p:nvPr/>
           </p:nvCxnSpPr>
@@ -5136,7 +5101,7 @@
         </p:cxnSp>
         <p:cxnSp>
           <p:nvCxnSpPr>
-            <p:cNvPr id="48" name="マスの線 3"/>
+            <p:cNvPr id="47" name="マスの線 3"/>
             <p:cNvCxnSpPr/>
             <p:nvPr/>
           </p:nvCxnSpPr>
@@ -5172,7 +5137,7 @@
         </p:cxnSp>
         <p:cxnSp>
           <p:nvCxnSpPr>
-            <p:cNvPr id="49" name="マスの線 4"/>
+            <p:cNvPr id="48" name="マスの線 4"/>
             <p:cNvCxnSpPr/>
             <p:nvPr/>
           </p:nvCxnSpPr>
@@ -5208,7 +5173,7 @@
         </p:cxnSp>
         <p:cxnSp>
           <p:nvCxnSpPr>
-            <p:cNvPr id="50" name="マスの線 5"/>
+            <p:cNvPr id="49" name="マスの線 5"/>
             <p:cNvCxnSpPr/>
             <p:nvPr/>
           </p:nvCxnSpPr>
@@ -5244,7 +5209,7 @@
         </p:cxnSp>
         <p:cxnSp>
           <p:nvCxnSpPr>
-            <p:cNvPr id="51" name="マスの線 6"/>
+            <p:cNvPr id="50" name="マスの線 6"/>
             <p:cNvCxnSpPr/>
             <p:nvPr/>
           </p:nvCxnSpPr>
@@ -5280,7 +5245,7 @@
         </p:cxnSp>
         <p:cxnSp>
           <p:nvCxnSpPr>
-            <p:cNvPr id="52" name="マスの線 7"/>
+            <p:cNvPr id="51" name="マスの線 7"/>
             <p:cNvCxnSpPr/>
             <p:nvPr/>
           </p:nvCxnSpPr>
@@ -5316,7 +5281,7 @@
         </p:cxnSp>
         <p:cxnSp>
           <p:nvCxnSpPr>
-            <p:cNvPr id="53" name="マスの線 8"/>
+            <p:cNvPr id="52" name="マスの線 8"/>
             <p:cNvCxnSpPr/>
             <p:nvPr/>
           </p:nvCxnSpPr>
@@ -5352,7 +5317,7 @@
         </p:cxnSp>
         <p:cxnSp>
           <p:nvCxnSpPr>
-            <p:cNvPr id="54" name="マスの線 9"/>
+            <p:cNvPr id="53" name="マスの線 9"/>
             <p:cNvCxnSpPr/>
             <p:nvPr/>
           </p:nvCxnSpPr>
@@ -5388,7 +5353,7 @@
         </p:cxnSp>
         <p:cxnSp>
           <p:nvCxnSpPr>
-            <p:cNvPr id="55" name="マスの線 10"/>
+            <p:cNvPr id="54" name="マスの線 10"/>
             <p:cNvCxnSpPr/>
             <p:nvPr/>
           </p:nvCxnSpPr>
@@ -5424,7 +5389,7 @@
         </p:cxnSp>
         <p:cxnSp>
           <p:nvCxnSpPr>
-            <p:cNvPr id="56" name="マスの線 11"/>
+            <p:cNvPr id="55" name="マスの線 11"/>
             <p:cNvCxnSpPr/>
             <p:nvPr/>
           </p:nvCxnSpPr>
@@ -5461,7 +5426,7 @@
       </p:grpSp>
       <p:grpSp>
         <p:nvGrpSpPr>
-          <p:cNvPr id="57" name="5行目"/>
+          <p:cNvPr id="56" name="5行目"/>
           <p:cNvGrpSpPr/>
           <p:nvPr/>
         </p:nvGrpSpPr>
@@ -5475,7 +5440,7 @@
         </p:grpSpPr>
         <p:sp>
           <p:nvSpPr>
-            <p:cNvPr id="58" name="外わく"/>
+            <p:cNvPr id="57" name="外わく"/>
             <p:cNvSpPr/>
             <p:nvPr/>
           </p:nvSpPr>
@@ -5519,7 +5484,7 @@
         </p:sp>
         <p:cxnSp>
           <p:nvCxnSpPr>
-            <p:cNvPr id="59" name="マスの線 1"/>
+            <p:cNvPr id="58" name="マスの線 1"/>
             <p:cNvCxnSpPr/>
             <p:nvPr/>
           </p:nvCxnSpPr>
@@ -5555,7 +5520,7 @@
         </p:cxnSp>
         <p:cxnSp>
           <p:nvCxnSpPr>
-            <p:cNvPr id="60" name="マスの線 2"/>
+            <p:cNvPr id="59" name="マスの線 2"/>
             <p:cNvCxnSpPr/>
             <p:nvPr/>
           </p:nvCxnSpPr>
@@ -5591,7 +5556,7 @@
         </p:cxnSp>
         <p:cxnSp>
           <p:nvCxnSpPr>
-            <p:cNvPr id="61" name="マスの線 3"/>
+            <p:cNvPr id="60" name="マスの線 3"/>
             <p:cNvCxnSpPr/>
             <p:nvPr/>
           </p:nvCxnSpPr>
@@ -5627,7 +5592,7 @@
         </p:cxnSp>
         <p:cxnSp>
           <p:nvCxnSpPr>
-            <p:cNvPr id="62" name="マスの線 4"/>
+            <p:cNvPr id="61" name="マスの線 4"/>
             <p:cNvCxnSpPr/>
             <p:nvPr/>
           </p:nvCxnSpPr>
@@ -5663,7 +5628,7 @@
         </p:cxnSp>
         <p:cxnSp>
           <p:nvCxnSpPr>
-            <p:cNvPr id="63" name="マスの線 5"/>
+            <p:cNvPr id="62" name="マスの線 5"/>
             <p:cNvCxnSpPr/>
             <p:nvPr/>
           </p:nvCxnSpPr>
@@ -5699,7 +5664,7 @@
         </p:cxnSp>
         <p:cxnSp>
           <p:nvCxnSpPr>
-            <p:cNvPr id="64" name="マスの線 6"/>
+            <p:cNvPr id="63" name="マスの線 6"/>
             <p:cNvCxnSpPr/>
             <p:nvPr/>
           </p:nvCxnSpPr>
@@ -5735,7 +5700,7 @@
         </p:cxnSp>
         <p:cxnSp>
           <p:nvCxnSpPr>
-            <p:cNvPr id="65" name="マスの線 7"/>
+            <p:cNvPr id="64" name="マスの線 7"/>
             <p:cNvCxnSpPr/>
             <p:nvPr/>
           </p:nvCxnSpPr>
@@ -5771,7 +5736,7 @@
         </p:cxnSp>
         <p:cxnSp>
           <p:nvCxnSpPr>
-            <p:cNvPr id="66" name="マスの線 8"/>
+            <p:cNvPr id="65" name="マスの線 8"/>
             <p:cNvCxnSpPr/>
             <p:nvPr/>
           </p:nvCxnSpPr>
@@ -5807,7 +5772,7 @@
         </p:cxnSp>
         <p:cxnSp>
           <p:nvCxnSpPr>
-            <p:cNvPr id="67" name="マスの線 9"/>
+            <p:cNvPr id="66" name="マスの線 9"/>
             <p:cNvCxnSpPr/>
             <p:nvPr/>
           </p:nvCxnSpPr>
@@ -5843,7 +5808,7 @@
         </p:cxnSp>
         <p:cxnSp>
           <p:nvCxnSpPr>
-            <p:cNvPr id="68" name="マスの線 10"/>
+            <p:cNvPr id="67" name="マスの線 10"/>
             <p:cNvCxnSpPr/>
             <p:nvPr/>
           </p:nvCxnSpPr>
@@ -5879,7 +5844,7 @@
         </p:cxnSp>
         <p:cxnSp>
           <p:nvCxnSpPr>
-            <p:cNvPr id="69" name="マスの線 11"/>
+            <p:cNvPr id="68" name="マスの線 11"/>
             <p:cNvCxnSpPr/>
             <p:nvPr/>
           </p:nvCxnSpPr>
@@ -5916,7 +5881,7 @@
       </p:grpSp>
       <p:grpSp>
         <p:nvGrpSpPr>
-          <p:cNvPr id="70" name="6行目"/>
+          <p:cNvPr id="69" name="6行目"/>
           <p:cNvGrpSpPr/>
           <p:nvPr/>
         </p:nvGrpSpPr>
@@ -5930,7 +5895,7 @@
         </p:grpSpPr>
         <p:sp>
           <p:nvSpPr>
-            <p:cNvPr id="71" name="外わく"/>
+            <p:cNvPr id="70" name="外わく"/>
             <p:cNvSpPr/>
             <p:nvPr/>
           </p:nvSpPr>
@@ -5974,7 +5939,7 @@
         </p:sp>
         <p:cxnSp>
           <p:nvCxnSpPr>
-            <p:cNvPr id="72" name="マスの線 1"/>
+            <p:cNvPr id="71" name="マスの線 1"/>
             <p:cNvCxnSpPr/>
             <p:nvPr/>
           </p:nvCxnSpPr>
@@ -6010,7 +5975,7 @@
         </p:cxnSp>
         <p:cxnSp>
           <p:nvCxnSpPr>
-            <p:cNvPr id="73" name="マスの線 2"/>
+            <p:cNvPr id="72" name="マスの線 2"/>
             <p:cNvCxnSpPr/>
             <p:nvPr/>
           </p:nvCxnSpPr>
@@ -6046,7 +6011,7 @@
         </p:cxnSp>
         <p:cxnSp>
           <p:nvCxnSpPr>
-            <p:cNvPr id="74" name="マスの線 3"/>
+            <p:cNvPr id="73" name="マスの線 3"/>
             <p:cNvCxnSpPr/>
             <p:nvPr/>
           </p:nvCxnSpPr>
@@ -6082,7 +6047,7 @@
         </p:cxnSp>
         <p:cxnSp>
           <p:nvCxnSpPr>
-            <p:cNvPr id="75" name="マスの線 4"/>
+            <p:cNvPr id="74" name="マスの線 4"/>
             <p:cNvCxnSpPr/>
             <p:nvPr/>
           </p:nvCxnSpPr>
@@ -6118,7 +6083,7 @@
         </p:cxnSp>
         <p:cxnSp>
           <p:nvCxnSpPr>
-            <p:cNvPr id="76" name="マスの線 5"/>
+            <p:cNvPr id="75" name="マスの線 5"/>
             <p:cNvCxnSpPr/>
             <p:nvPr/>
           </p:nvCxnSpPr>
@@ -6154,7 +6119,7 @@
         </p:cxnSp>
         <p:cxnSp>
           <p:nvCxnSpPr>
-            <p:cNvPr id="77" name="マスの線 6"/>
+            <p:cNvPr id="76" name="マスの線 6"/>
             <p:cNvCxnSpPr/>
             <p:nvPr/>
           </p:nvCxnSpPr>
@@ -6190,7 +6155,7 @@
         </p:cxnSp>
         <p:cxnSp>
           <p:nvCxnSpPr>
-            <p:cNvPr id="78" name="マスの線 7"/>
+            <p:cNvPr id="77" name="マスの線 7"/>
             <p:cNvCxnSpPr/>
             <p:nvPr/>
           </p:nvCxnSpPr>
@@ -6226,7 +6191,7 @@
         </p:cxnSp>
         <p:cxnSp>
           <p:nvCxnSpPr>
-            <p:cNvPr id="79" name="マスの線 8"/>
+            <p:cNvPr id="78" name="マスの線 8"/>
             <p:cNvCxnSpPr/>
             <p:nvPr/>
           </p:nvCxnSpPr>
@@ -6262,7 +6227,7 @@
         </p:cxnSp>
         <p:cxnSp>
           <p:nvCxnSpPr>
-            <p:cNvPr id="80" name="マスの線 9"/>
+            <p:cNvPr id="79" name="マスの線 9"/>
             <p:cNvCxnSpPr/>
             <p:nvPr/>
           </p:nvCxnSpPr>
@@ -6298,7 +6263,7 @@
         </p:cxnSp>
         <p:cxnSp>
           <p:nvCxnSpPr>
-            <p:cNvPr id="81" name="マスの線 10"/>
+            <p:cNvPr id="80" name="マスの線 10"/>
             <p:cNvCxnSpPr/>
             <p:nvPr/>
           </p:nvCxnSpPr>
@@ -6334,7 +6299,7 @@
         </p:cxnSp>
         <p:cxnSp>
           <p:nvCxnSpPr>
-            <p:cNvPr id="82" name="マスの線 11"/>
+            <p:cNvPr id="81" name="マスの線 11"/>
             <p:cNvCxnSpPr/>
             <p:nvPr/>
           </p:nvCxnSpPr>
@@ -6371,7 +6336,7 @@
       </p:grpSp>
       <p:grpSp>
         <p:nvGrpSpPr>
-          <p:cNvPr id="83" name="7行目"/>
+          <p:cNvPr id="82" name="7行目"/>
           <p:cNvGrpSpPr/>
           <p:nvPr/>
         </p:nvGrpSpPr>
@@ -6385,7 +6350,7 @@
         </p:grpSpPr>
         <p:sp>
           <p:nvSpPr>
-            <p:cNvPr id="84" name="外わく"/>
+            <p:cNvPr id="83" name="外わく"/>
             <p:cNvSpPr/>
             <p:nvPr/>
           </p:nvSpPr>
@@ -6429,7 +6394,7 @@
         </p:sp>
         <p:cxnSp>
           <p:nvCxnSpPr>
-            <p:cNvPr id="85" name="マスの線 1"/>
+            <p:cNvPr id="84" name="マスの線 1"/>
             <p:cNvCxnSpPr/>
             <p:nvPr/>
           </p:nvCxnSpPr>
@@ -6465,7 +6430,7 @@
         </p:cxnSp>
         <p:cxnSp>
           <p:nvCxnSpPr>
-            <p:cNvPr id="86" name="マスの線 2"/>
+            <p:cNvPr id="85" name="マスの線 2"/>
             <p:cNvCxnSpPr/>
             <p:nvPr/>
           </p:nvCxnSpPr>
@@ -6501,7 +6466,7 @@
         </p:cxnSp>
         <p:cxnSp>
           <p:nvCxnSpPr>
-            <p:cNvPr id="87" name="マスの線 3"/>
+            <p:cNvPr id="86" name="マスの線 3"/>
             <p:cNvCxnSpPr/>
             <p:nvPr/>
           </p:nvCxnSpPr>
@@ -6537,7 +6502,7 @@
         </p:cxnSp>
         <p:cxnSp>
           <p:nvCxnSpPr>
-            <p:cNvPr id="88" name="マスの線 4"/>
+            <p:cNvPr id="87" name="マスの線 4"/>
             <p:cNvCxnSpPr/>
             <p:nvPr/>
           </p:nvCxnSpPr>
@@ -6573,7 +6538,7 @@
         </p:cxnSp>
         <p:cxnSp>
           <p:nvCxnSpPr>
-            <p:cNvPr id="89" name="マスの線 5"/>
+            <p:cNvPr id="88" name="マスの線 5"/>
             <p:cNvCxnSpPr/>
             <p:nvPr/>
           </p:nvCxnSpPr>
@@ -6609,7 +6574,7 @@
         </p:cxnSp>
         <p:cxnSp>
           <p:nvCxnSpPr>
-            <p:cNvPr id="90" name="マスの線 6"/>
+            <p:cNvPr id="89" name="マスの線 6"/>
             <p:cNvCxnSpPr/>
             <p:nvPr/>
           </p:nvCxnSpPr>
@@ -6645,7 +6610,7 @@
         </p:cxnSp>
         <p:cxnSp>
           <p:nvCxnSpPr>
-            <p:cNvPr id="91" name="マスの線 7"/>
+            <p:cNvPr id="90" name="マスの線 7"/>
             <p:cNvCxnSpPr/>
             <p:nvPr/>
           </p:nvCxnSpPr>
@@ -6681,7 +6646,7 @@
         </p:cxnSp>
         <p:cxnSp>
           <p:nvCxnSpPr>
-            <p:cNvPr id="92" name="マスの線 8"/>
+            <p:cNvPr id="91" name="マスの線 8"/>
             <p:cNvCxnSpPr/>
             <p:nvPr/>
           </p:nvCxnSpPr>
@@ -6717,7 +6682,7 @@
         </p:cxnSp>
         <p:cxnSp>
           <p:nvCxnSpPr>
-            <p:cNvPr id="93" name="マスの線 9"/>
+            <p:cNvPr id="92" name="マスの線 9"/>
             <p:cNvCxnSpPr/>
             <p:nvPr/>
           </p:nvCxnSpPr>
@@ -6753,7 +6718,7 @@
         </p:cxnSp>
         <p:cxnSp>
           <p:nvCxnSpPr>
-            <p:cNvPr id="94" name="マスの線 10"/>
+            <p:cNvPr id="93" name="マスの線 10"/>
             <p:cNvCxnSpPr/>
             <p:nvPr/>
           </p:nvCxnSpPr>
@@ -6789,7 +6754,7 @@
         </p:cxnSp>
         <p:cxnSp>
           <p:nvCxnSpPr>
-            <p:cNvPr id="95" name="マスの線 11"/>
+            <p:cNvPr id="94" name="マスの線 11"/>
             <p:cNvCxnSpPr/>
             <p:nvPr/>
           </p:nvCxnSpPr>
@@ -6826,7 +6791,7 @@
       </p:grpSp>
       <p:grpSp>
         <p:nvGrpSpPr>
-          <p:cNvPr id="96" name="8行目"/>
+          <p:cNvPr id="95" name="8行目"/>
           <p:cNvGrpSpPr/>
           <p:nvPr/>
         </p:nvGrpSpPr>
@@ -6840,7 +6805,7 @@
         </p:grpSpPr>
         <p:sp>
           <p:nvSpPr>
-            <p:cNvPr id="97" name="外わく"/>
+            <p:cNvPr id="96" name="外わく"/>
             <p:cNvSpPr/>
             <p:nvPr/>
           </p:nvSpPr>
@@ -6884,7 +6849,7 @@
         </p:sp>
         <p:cxnSp>
           <p:nvCxnSpPr>
-            <p:cNvPr id="98" name="マスの線 1"/>
+            <p:cNvPr id="97" name="マスの線 1"/>
             <p:cNvCxnSpPr/>
             <p:nvPr/>
           </p:nvCxnSpPr>
@@ -6920,7 +6885,7 @@
         </p:cxnSp>
         <p:cxnSp>
           <p:nvCxnSpPr>
-            <p:cNvPr id="99" name="マスの線 2"/>
+            <p:cNvPr id="98" name="マスの線 2"/>
             <p:cNvCxnSpPr/>
             <p:nvPr/>
           </p:nvCxnSpPr>
@@ -6956,7 +6921,7 @@
         </p:cxnSp>
         <p:cxnSp>
           <p:nvCxnSpPr>
-            <p:cNvPr id="100" name="マスの線 3"/>
+            <p:cNvPr id="99" name="マスの線 3"/>
             <p:cNvCxnSpPr/>
             <p:nvPr/>
           </p:nvCxnSpPr>
@@ -6992,7 +6957,7 @@
         </p:cxnSp>
         <p:cxnSp>
           <p:nvCxnSpPr>
-            <p:cNvPr id="101" name="マスの線 4"/>
+            <p:cNvPr id="100" name="マスの線 4"/>
             <p:cNvCxnSpPr/>
             <p:nvPr/>
           </p:nvCxnSpPr>
@@ -7028,7 +6993,7 @@
         </p:cxnSp>
         <p:cxnSp>
           <p:nvCxnSpPr>
-            <p:cNvPr id="102" name="マスの線 5"/>
+            <p:cNvPr id="101" name="マスの線 5"/>
             <p:cNvCxnSpPr/>
             <p:nvPr/>
           </p:nvCxnSpPr>
@@ -7064,7 +7029,7 @@
         </p:cxnSp>
         <p:cxnSp>
           <p:nvCxnSpPr>
-            <p:cNvPr id="103" name="マスの線 6"/>
+            <p:cNvPr id="102" name="マスの線 6"/>
             <p:cNvCxnSpPr/>
             <p:nvPr/>
           </p:nvCxnSpPr>
@@ -7100,7 +7065,7 @@
         </p:cxnSp>
         <p:cxnSp>
           <p:nvCxnSpPr>
-            <p:cNvPr id="104" name="マスの線 7"/>
+            <p:cNvPr id="103" name="マスの線 7"/>
             <p:cNvCxnSpPr/>
             <p:nvPr/>
           </p:nvCxnSpPr>
@@ -7136,7 +7101,7 @@
         </p:cxnSp>
         <p:cxnSp>
           <p:nvCxnSpPr>
-            <p:cNvPr id="105" name="マスの線 8"/>
+            <p:cNvPr id="104" name="マスの線 8"/>
             <p:cNvCxnSpPr/>
             <p:nvPr/>
           </p:nvCxnSpPr>
@@ -7172,7 +7137,7 @@
         </p:cxnSp>
         <p:cxnSp>
           <p:nvCxnSpPr>
-            <p:cNvPr id="106" name="マスの線 9"/>
+            <p:cNvPr id="105" name="マスの線 9"/>
             <p:cNvCxnSpPr/>
             <p:nvPr/>
           </p:nvCxnSpPr>
@@ -7208,7 +7173,7 @@
         </p:cxnSp>
         <p:cxnSp>
           <p:nvCxnSpPr>
-            <p:cNvPr id="107" name="マスの線 10"/>
+            <p:cNvPr id="106" name="マスの線 10"/>
             <p:cNvCxnSpPr/>
             <p:nvPr/>
           </p:nvCxnSpPr>
@@ -7244,7 +7209,7 @@
         </p:cxnSp>
         <p:cxnSp>
           <p:nvCxnSpPr>
-            <p:cNvPr id="108" name="マスの線 11"/>
+            <p:cNvPr id="107" name="マスの線 11"/>
             <p:cNvCxnSpPr/>
             <p:nvPr/>
           </p:nvCxnSpPr>
@@ -7281,7 +7246,7 @@
       </p:grpSp>
       <p:grpSp>
         <p:nvGrpSpPr>
-          <p:cNvPr id="109" name="9行目"/>
+          <p:cNvPr id="108" name="9行目"/>
           <p:cNvGrpSpPr/>
           <p:nvPr/>
         </p:nvGrpSpPr>
@@ -7295,7 +7260,7 @@
         </p:grpSpPr>
         <p:sp>
           <p:nvSpPr>
-            <p:cNvPr id="110" name="外わく"/>
+            <p:cNvPr id="109" name="外わく"/>
             <p:cNvSpPr/>
             <p:nvPr/>
           </p:nvSpPr>
@@ -7339,7 +7304,7 @@
         </p:sp>
         <p:cxnSp>
           <p:nvCxnSpPr>
-            <p:cNvPr id="111" name="マスの線 1"/>
+            <p:cNvPr id="110" name="マスの線 1"/>
             <p:cNvCxnSpPr/>
             <p:nvPr/>
           </p:nvCxnSpPr>
@@ -7375,7 +7340,7 @@
         </p:cxnSp>
         <p:cxnSp>
           <p:nvCxnSpPr>
-            <p:cNvPr id="112" name="マスの線 2"/>
+            <p:cNvPr id="111" name="マスの線 2"/>
             <p:cNvCxnSpPr/>
             <p:nvPr/>
           </p:nvCxnSpPr>
@@ -7411,7 +7376,7 @@
         </p:cxnSp>
         <p:cxnSp>
           <p:nvCxnSpPr>
-            <p:cNvPr id="113" name="マスの線 3"/>
+            <p:cNvPr id="112" name="マスの線 3"/>
             <p:cNvCxnSpPr/>
             <p:nvPr/>
           </p:nvCxnSpPr>
@@ -7447,7 +7412,7 @@
         </p:cxnSp>
         <p:cxnSp>
           <p:nvCxnSpPr>
-            <p:cNvPr id="114" name="マスの線 4"/>
+            <p:cNvPr id="113" name="マスの線 4"/>
             <p:cNvCxnSpPr/>
             <p:nvPr/>
           </p:nvCxnSpPr>
@@ -7483,7 +7448,7 @@
         </p:cxnSp>
         <p:cxnSp>
           <p:nvCxnSpPr>
-            <p:cNvPr id="115" name="マスの線 5"/>
+            <p:cNvPr id="114" name="マスの線 5"/>
             <p:cNvCxnSpPr/>
             <p:nvPr/>
           </p:nvCxnSpPr>
@@ -7519,7 +7484,7 @@
         </p:cxnSp>
         <p:cxnSp>
           <p:nvCxnSpPr>
-            <p:cNvPr id="116" name="マスの線 6"/>
+            <p:cNvPr id="115" name="マスの線 6"/>
             <p:cNvCxnSpPr/>
             <p:nvPr/>
           </p:nvCxnSpPr>
@@ -7555,7 +7520,7 @@
         </p:cxnSp>
         <p:cxnSp>
           <p:nvCxnSpPr>
-            <p:cNvPr id="117" name="マスの線 7"/>
+            <p:cNvPr id="116" name="マスの線 7"/>
             <p:cNvCxnSpPr/>
             <p:nvPr/>
           </p:nvCxnSpPr>
@@ -7591,7 +7556,7 @@
         </p:cxnSp>
         <p:cxnSp>
           <p:nvCxnSpPr>
-            <p:cNvPr id="118" name="マスの線 8"/>
+            <p:cNvPr id="117" name="マスの線 8"/>
             <p:cNvCxnSpPr/>
             <p:nvPr/>
           </p:nvCxnSpPr>
@@ -7627,7 +7592,7 @@
         </p:cxnSp>
         <p:cxnSp>
           <p:nvCxnSpPr>
-            <p:cNvPr id="119" name="マスの線 9"/>
+            <p:cNvPr id="118" name="マスの線 9"/>
             <p:cNvCxnSpPr/>
             <p:nvPr/>
           </p:nvCxnSpPr>
@@ -7663,7 +7628,7 @@
         </p:cxnSp>
         <p:cxnSp>
           <p:nvCxnSpPr>
-            <p:cNvPr id="120" name="マスの線 10"/>
+            <p:cNvPr id="119" name="マスの線 10"/>
             <p:cNvCxnSpPr/>
             <p:nvPr/>
           </p:nvCxnSpPr>
@@ -7699,7 +7664,7 @@
         </p:cxnSp>
         <p:cxnSp>
           <p:nvCxnSpPr>
-            <p:cNvPr id="121" name="マスの線 11"/>
+            <p:cNvPr id="120" name="マスの線 11"/>
             <p:cNvCxnSpPr/>
             <p:nvPr/>
           </p:nvCxnSpPr>
@@ -7736,7 +7701,7 @@
       </p:grpSp>
       <p:grpSp>
         <p:nvGrpSpPr>
-          <p:cNvPr id="122" name="10行目"/>
+          <p:cNvPr id="121" name="10行目"/>
           <p:cNvGrpSpPr/>
           <p:nvPr/>
         </p:nvGrpSpPr>
@@ -7750,7 +7715,7 @@
         </p:grpSpPr>
         <p:sp>
           <p:nvSpPr>
-            <p:cNvPr id="123" name="外わく"/>
+            <p:cNvPr id="122" name="外わく"/>
             <p:cNvSpPr/>
             <p:nvPr/>
           </p:nvSpPr>
@@ -7794,7 +7759,7 @@
         </p:sp>
         <p:cxnSp>
           <p:nvCxnSpPr>
-            <p:cNvPr id="124" name="マスの線 1"/>
+            <p:cNvPr id="123" name="マスの線 1"/>
             <p:cNvCxnSpPr/>
             <p:nvPr/>
           </p:nvCxnSpPr>
@@ -7830,7 +7795,7 @@
         </p:cxnSp>
         <p:cxnSp>
           <p:nvCxnSpPr>
-            <p:cNvPr id="125" name="マスの線 2"/>
+            <p:cNvPr id="124" name="マスの線 2"/>
             <p:cNvCxnSpPr/>
             <p:nvPr/>
           </p:nvCxnSpPr>
@@ -7866,7 +7831,7 @@
         </p:cxnSp>
         <p:cxnSp>
           <p:nvCxnSpPr>
-            <p:cNvPr id="126" name="マスの線 3"/>
+            <p:cNvPr id="125" name="マスの線 3"/>
             <p:cNvCxnSpPr/>
             <p:nvPr/>
           </p:nvCxnSpPr>
@@ -7902,7 +7867,7 @@
         </p:cxnSp>
         <p:cxnSp>
           <p:nvCxnSpPr>
-            <p:cNvPr id="127" name="マスの線 4"/>
+            <p:cNvPr id="126" name="マスの線 4"/>
             <p:cNvCxnSpPr/>
             <p:nvPr/>
           </p:nvCxnSpPr>
@@ -7938,7 +7903,7 @@
         </p:cxnSp>
         <p:cxnSp>
           <p:nvCxnSpPr>
-            <p:cNvPr id="128" name="マスの線 5"/>
+            <p:cNvPr id="127" name="マスの線 5"/>
             <p:cNvCxnSpPr/>
             <p:nvPr/>
           </p:nvCxnSpPr>
@@ -7974,7 +7939,7 @@
         </p:cxnSp>
         <p:cxnSp>
           <p:nvCxnSpPr>
-            <p:cNvPr id="129" name="マスの線 6"/>
+            <p:cNvPr id="128" name="マスの線 6"/>
             <p:cNvCxnSpPr/>
             <p:nvPr/>
           </p:nvCxnSpPr>
@@ -8010,7 +7975,7 @@
         </p:cxnSp>
         <p:cxnSp>
           <p:nvCxnSpPr>
-            <p:cNvPr id="130" name="マスの線 7"/>
+            <p:cNvPr id="129" name="マスの線 7"/>
             <p:cNvCxnSpPr/>
             <p:nvPr/>
           </p:nvCxnSpPr>
@@ -8046,7 +8011,7 @@
         </p:cxnSp>
         <p:cxnSp>
           <p:nvCxnSpPr>
-            <p:cNvPr id="131" name="マスの線 8"/>
+            <p:cNvPr id="130" name="マスの線 8"/>
             <p:cNvCxnSpPr/>
             <p:nvPr/>
           </p:nvCxnSpPr>
@@ -8082,7 +8047,7 @@
         </p:cxnSp>
         <p:cxnSp>
           <p:nvCxnSpPr>
-            <p:cNvPr id="132" name="マスの線 9"/>
+            <p:cNvPr id="131" name="マスの線 9"/>
             <p:cNvCxnSpPr/>
             <p:nvPr/>
           </p:nvCxnSpPr>
@@ -8118,7 +8083,7 @@
         </p:cxnSp>
         <p:cxnSp>
           <p:nvCxnSpPr>
-            <p:cNvPr id="133" name="マスの線 10"/>
+            <p:cNvPr id="132" name="マスの線 10"/>
             <p:cNvCxnSpPr/>
             <p:nvPr/>
           </p:nvCxnSpPr>
@@ -8154,7 +8119,7 @@
         </p:cxnSp>
         <p:cxnSp>
           <p:nvCxnSpPr>
-            <p:cNvPr id="134" name="マスの線 11"/>
+            <p:cNvPr id="133" name="マスの線 11"/>
             <p:cNvCxnSpPr/>
             <p:nvPr/>
           </p:nvCxnSpPr>
@@ -8191,7 +8156,7 @@
       </p:grpSp>
       <p:grpSp>
         <p:nvGrpSpPr>
-          <p:cNvPr id="135" name="11行目"/>
+          <p:cNvPr id="134" name="11行目"/>
           <p:cNvGrpSpPr/>
           <p:nvPr/>
         </p:nvGrpSpPr>
@@ -8205,7 +8170,7 @@
         </p:grpSpPr>
         <p:sp>
           <p:nvSpPr>
-            <p:cNvPr id="136" name="外わく"/>
+            <p:cNvPr id="135" name="外わく"/>
             <p:cNvSpPr/>
             <p:nvPr/>
           </p:nvSpPr>
@@ -8249,7 +8214,7 @@
         </p:sp>
         <p:cxnSp>
           <p:nvCxnSpPr>
-            <p:cNvPr id="137" name="マスの線 1"/>
+            <p:cNvPr id="136" name="マスの線 1"/>
             <p:cNvCxnSpPr/>
             <p:nvPr/>
           </p:nvCxnSpPr>
@@ -8285,7 +8250,7 @@
         </p:cxnSp>
         <p:cxnSp>
           <p:nvCxnSpPr>
-            <p:cNvPr id="138" name="マスの線 2"/>
+            <p:cNvPr id="137" name="マスの線 2"/>
             <p:cNvCxnSpPr/>
             <p:nvPr/>
           </p:nvCxnSpPr>
@@ -8321,7 +8286,7 @@
         </p:cxnSp>
         <p:cxnSp>
           <p:nvCxnSpPr>
-            <p:cNvPr id="139" name="マスの線 3"/>
+            <p:cNvPr id="138" name="マスの線 3"/>
             <p:cNvCxnSpPr/>
             <p:nvPr/>
           </p:nvCxnSpPr>
@@ -8357,7 +8322,7 @@
         </p:cxnSp>
         <p:cxnSp>
           <p:nvCxnSpPr>
-            <p:cNvPr id="140" name="マスの線 4"/>
+            <p:cNvPr id="139" name="マスの線 4"/>
             <p:cNvCxnSpPr/>
             <p:nvPr/>
           </p:nvCxnSpPr>
@@ -8393,7 +8358,7 @@
         </p:cxnSp>
         <p:cxnSp>
           <p:nvCxnSpPr>
-            <p:cNvPr id="141" name="マスの線 5"/>
+            <p:cNvPr id="140" name="マスの線 5"/>
             <p:cNvCxnSpPr/>
             <p:nvPr/>
           </p:nvCxnSpPr>
@@ -8429,7 +8394,7 @@
         </p:cxnSp>
         <p:cxnSp>
           <p:nvCxnSpPr>
-            <p:cNvPr id="142" name="マスの線 6"/>
+            <p:cNvPr id="141" name="マスの線 6"/>
             <p:cNvCxnSpPr/>
             <p:nvPr/>
           </p:nvCxnSpPr>
@@ -8465,7 +8430,7 @@
         </p:cxnSp>
         <p:cxnSp>
           <p:nvCxnSpPr>
-            <p:cNvPr id="143" name="マスの線 7"/>
+            <p:cNvPr id="142" name="マスの線 7"/>
             <p:cNvCxnSpPr/>
             <p:nvPr/>
           </p:nvCxnSpPr>
@@ -8501,7 +8466,7 @@
         </p:cxnSp>
         <p:cxnSp>
           <p:nvCxnSpPr>
-            <p:cNvPr id="144" name="マスの線 8"/>
+            <p:cNvPr id="143" name="マスの線 8"/>
             <p:cNvCxnSpPr/>
             <p:nvPr/>
           </p:nvCxnSpPr>
@@ -8537,7 +8502,7 @@
         </p:cxnSp>
         <p:cxnSp>
           <p:nvCxnSpPr>
-            <p:cNvPr id="145" name="マスの線 9"/>
+            <p:cNvPr id="144" name="マスの線 9"/>
             <p:cNvCxnSpPr/>
             <p:nvPr/>
           </p:nvCxnSpPr>
@@ -8573,7 +8538,7 @@
         </p:cxnSp>
         <p:cxnSp>
           <p:nvCxnSpPr>
-            <p:cNvPr id="146" name="マスの線 10"/>
+            <p:cNvPr id="145" name="マスの線 10"/>
             <p:cNvCxnSpPr/>
             <p:nvPr/>
           </p:nvCxnSpPr>
@@ -8609,7 +8574,7 @@
         </p:cxnSp>
         <p:cxnSp>
           <p:nvCxnSpPr>
-            <p:cNvPr id="147" name="マスの線 11"/>
+            <p:cNvPr id="146" name="マスの線 11"/>
             <p:cNvCxnSpPr/>
             <p:nvPr/>
           </p:nvCxnSpPr>
@@ -8646,7 +8611,7 @@
       </p:grpSp>
       <p:grpSp>
         <p:nvGrpSpPr>
-          <p:cNvPr id="148" name="12行目"/>
+          <p:cNvPr id="147" name="12行目"/>
           <p:cNvGrpSpPr/>
           <p:nvPr/>
         </p:nvGrpSpPr>
@@ -8660,7 +8625,7 @@
         </p:grpSpPr>
         <p:sp>
           <p:nvSpPr>
-            <p:cNvPr id="149" name="外わく"/>
+            <p:cNvPr id="148" name="外わく"/>
             <p:cNvSpPr/>
             <p:nvPr/>
           </p:nvSpPr>
@@ -8704,7 +8669,7 @@
         </p:sp>
         <p:cxnSp>
           <p:nvCxnSpPr>
-            <p:cNvPr id="150" name="マスの線 1"/>
+            <p:cNvPr id="149" name="マスの線 1"/>
             <p:cNvCxnSpPr/>
             <p:nvPr/>
           </p:nvCxnSpPr>
@@ -8740,7 +8705,7 @@
         </p:cxnSp>
         <p:cxnSp>
           <p:nvCxnSpPr>
-            <p:cNvPr id="151" name="マスの線 2"/>
+            <p:cNvPr id="150" name="マスの線 2"/>
             <p:cNvCxnSpPr/>
             <p:nvPr/>
           </p:nvCxnSpPr>
@@ -8776,7 +8741,7 @@
         </p:cxnSp>
         <p:cxnSp>
           <p:nvCxnSpPr>
-            <p:cNvPr id="152" name="マスの線 3"/>
+            <p:cNvPr id="151" name="マスの線 3"/>
             <p:cNvCxnSpPr/>
             <p:nvPr/>
           </p:nvCxnSpPr>
@@ -8812,7 +8777,7 @@
         </p:cxnSp>
         <p:cxnSp>
           <p:nvCxnSpPr>
-            <p:cNvPr id="153" name="マスの線 4"/>
+            <p:cNvPr id="152" name="マスの線 4"/>
             <p:cNvCxnSpPr/>
             <p:nvPr/>
           </p:nvCxnSpPr>
@@ -8848,7 +8813,7 @@
         </p:cxnSp>
         <p:cxnSp>
           <p:nvCxnSpPr>
-            <p:cNvPr id="154" name="マスの線 5"/>
+            <p:cNvPr id="153" name="マスの線 5"/>
             <p:cNvCxnSpPr/>
             <p:nvPr/>
           </p:nvCxnSpPr>
@@ -8884,7 +8849,7 @@
         </p:cxnSp>
         <p:cxnSp>
           <p:nvCxnSpPr>
-            <p:cNvPr id="155" name="マスの線 6"/>
+            <p:cNvPr id="154" name="マスの線 6"/>
             <p:cNvCxnSpPr/>
             <p:nvPr/>
           </p:nvCxnSpPr>
@@ -8920,7 +8885,7 @@
         </p:cxnSp>
         <p:cxnSp>
           <p:nvCxnSpPr>
-            <p:cNvPr id="156" name="マスの線 7"/>
+            <p:cNvPr id="155" name="マスの線 7"/>
             <p:cNvCxnSpPr/>
             <p:nvPr/>
           </p:nvCxnSpPr>
@@ -8956,7 +8921,7 @@
         </p:cxnSp>
         <p:cxnSp>
           <p:nvCxnSpPr>
-            <p:cNvPr id="157" name="マスの線 8"/>
+            <p:cNvPr id="156" name="マスの線 8"/>
             <p:cNvCxnSpPr/>
             <p:nvPr/>
           </p:nvCxnSpPr>
@@ -8992,7 +8957,7 @@
         </p:cxnSp>
         <p:cxnSp>
           <p:nvCxnSpPr>
-            <p:cNvPr id="158" name="マスの線 9"/>
+            <p:cNvPr id="157" name="マスの線 9"/>
             <p:cNvCxnSpPr/>
             <p:nvPr/>
           </p:nvCxnSpPr>
@@ -9028,7 +8993,7 @@
         </p:cxnSp>
         <p:cxnSp>
           <p:nvCxnSpPr>
-            <p:cNvPr id="159" name="マスの線 10"/>
+            <p:cNvPr id="158" name="マスの線 10"/>
             <p:cNvCxnSpPr/>
             <p:nvPr/>
           </p:nvCxnSpPr>
@@ -9064,7 +9029,7 @@
         </p:cxnSp>
         <p:cxnSp>
           <p:nvCxnSpPr>
-            <p:cNvPr id="160" name="マスの線 11"/>
+            <p:cNvPr id="159" name="マスの線 11"/>
             <p:cNvCxnSpPr/>
             <p:nvPr/>
           </p:nvCxnSpPr>
@@ -9101,7 +9066,7 @@
       </p:grpSp>
       <p:pic>
         <p:nvPicPr>
-          <p:cNvPr id="161" name="さし絵（消してもかまいません）" descr="_tmp_ill.png"/>
+          <p:cNvPr id="160" name="さし絵（消してもかまいません）" descr="_tmp_ill.png"/>
           <p:cNvPicPr>
             <a:picLocks noChangeAspect="1"/>
           </p:cNvPicPr>
@@ -9125,7 +9090,7 @@
       </p:pic>
       <p:sp>
         <p:nvSpPr>
-          <p:cNvPr id="162" name="紙の説明（消してもかまいません）"/>
+          <p:cNvPr id="161" name="紙の説明（消してもかまいません）"/>
           <p:cNvSpPr txBox="1"/>
           <p:nvPr/>
         </p:nvSpPr>
@@ -9160,7 +9125,7 @@
       </p:sp>
       <p:sp>
         <p:nvSpPr>
-          <p:cNvPr id="163" name="クレジット"/>
+          <p:cNvPr id="162" name="クレジット"/>
           <p:cNvSpPr txBox="1"/>
           <p:nvPr/>
         </p:nvSpPr>
